--- a/presentation/Tech_It_and_Go_Capstone_Presentation.pptx
+++ b/presentation/Tech_It_and_Go_Capstone_Presentation.pptx
@@ -2,30 +2,30 @@
 <file path=ppt/presentation.xml><?xml version="1.0" encoding="utf-8"?>
 <p:presentation xmlns:p="http://schemas.openxmlformats.org/presentationml/2006/main">
   <p:sldMasterIdLst>
-    <p:sldMasterId xmlns:r="http://schemas.openxmlformats.org/officeDocument/2006/relationships" id="2147483648" r:id="R8066f967b0704d89"/>
+    <p:sldMasterId xmlns:r="http://schemas.openxmlformats.org/officeDocument/2006/relationships" id="2147483648" r:id="R16036d4b8e4145f9"/>
   </p:sldMasterIdLst>
   <p:notesMasterIdLst>
-    <p:notesMasterId xmlns:r="http://schemas.openxmlformats.org/officeDocument/2006/relationships" r:id="Rfea0de82e5b344ce"/>
+    <p:notesMasterId xmlns:r="http://schemas.openxmlformats.org/officeDocument/2006/relationships" r:id="R77c8b651c9284c5a"/>
   </p:notesMasterIdLst>
   <p:sldIdLst>
-    <p:sldId xmlns:r="http://schemas.openxmlformats.org/officeDocument/2006/relationships" id="256" r:id="Ra8bad3a1c12741cb"/>
-    <p:sldId xmlns:r="http://schemas.openxmlformats.org/officeDocument/2006/relationships" id="257" r:id="R58dfa46938e344cd"/>
-    <p:sldId xmlns:r="http://schemas.openxmlformats.org/officeDocument/2006/relationships" id="258" r:id="R55a16214e7664a1e"/>
-    <p:sldId xmlns:r="http://schemas.openxmlformats.org/officeDocument/2006/relationships" id="259" r:id="Rb3819426d7234826"/>
-    <p:sldId xmlns:r="http://schemas.openxmlformats.org/officeDocument/2006/relationships" id="260" r:id="Rca1d029e34a14600"/>
-    <p:sldId xmlns:r="http://schemas.openxmlformats.org/officeDocument/2006/relationships" id="261" r:id="R8120bea1325a4a58"/>
-    <p:sldId xmlns:r="http://schemas.openxmlformats.org/officeDocument/2006/relationships" id="262" r:id="R89f011683811451f"/>
-    <p:sldId xmlns:r="http://schemas.openxmlformats.org/officeDocument/2006/relationships" id="263" r:id="R98ddcf3b89f547c8"/>
-    <p:sldId xmlns:r="http://schemas.openxmlformats.org/officeDocument/2006/relationships" id="264" r:id="R1ec377d7a24649ca"/>
-    <p:sldId xmlns:r="http://schemas.openxmlformats.org/officeDocument/2006/relationships" id="265" r:id="R5c930544bdce4e98"/>
-    <p:sldId xmlns:r="http://schemas.openxmlformats.org/officeDocument/2006/relationships" id="266" r:id="R1d4213dd7ca641d0"/>
-    <p:sldId xmlns:r="http://schemas.openxmlformats.org/officeDocument/2006/relationships" id="267" r:id="R08cf1ae4f0be4299"/>
-    <p:sldId xmlns:r="http://schemas.openxmlformats.org/officeDocument/2006/relationships" id="268" r:id="Rec80207cb8c34785"/>
-    <p:sldId xmlns:r="http://schemas.openxmlformats.org/officeDocument/2006/relationships" id="269" r:id="R3e33158de7ac4072"/>
-    <p:sldId xmlns:r="http://schemas.openxmlformats.org/officeDocument/2006/relationships" id="270" r:id="Rbece6950eadb41d9"/>
-    <p:sldId xmlns:r="http://schemas.openxmlformats.org/officeDocument/2006/relationships" id="271" r:id="Re458fbccb5bc437d"/>
-    <p:sldId xmlns:r="http://schemas.openxmlformats.org/officeDocument/2006/relationships" id="272" r:id="Rfdb930c571bd47c7"/>
-    <p:sldId xmlns:r="http://schemas.openxmlformats.org/officeDocument/2006/relationships" id="273" r:id="Rfe26c89f8819428c"/>
+    <p:sldId xmlns:r="http://schemas.openxmlformats.org/officeDocument/2006/relationships" id="256" r:id="Rdf25e7a1138b4c44"/>
+    <p:sldId xmlns:r="http://schemas.openxmlformats.org/officeDocument/2006/relationships" id="257" r:id="R6b2242d3063a45e6"/>
+    <p:sldId xmlns:r="http://schemas.openxmlformats.org/officeDocument/2006/relationships" id="258" r:id="R8338d4ebb42b4f9e"/>
+    <p:sldId xmlns:r="http://schemas.openxmlformats.org/officeDocument/2006/relationships" id="259" r:id="R69589859726543cc"/>
+    <p:sldId xmlns:r="http://schemas.openxmlformats.org/officeDocument/2006/relationships" id="260" r:id="R685b5ab774b241a5"/>
+    <p:sldId xmlns:r="http://schemas.openxmlformats.org/officeDocument/2006/relationships" id="261" r:id="R455aae8482ea4536"/>
+    <p:sldId xmlns:r="http://schemas.openxmlformats.org/officeDocument/2006/relationships" id="262" r:id="R35c23ec2d4124dc2"/>
+    <p:sldId xmlns:r="http://schemas.openxmlformats.org/officeDocument/2006/relationships" id="263" r:id="Rf58ff4c459dc46a8"/>
+    <p:sldId xmlns:r="http://schemas.openxmlformats.org/officeDocument/2006/relationships" id="264" r:id="R8b765b7660154851"/>
+    <p:sldId xmlns:r="http://schemas.openxmlformats.org/officeDocument/2006/relationships" id="265" r:id="R4ef3cf37a3cf44bb"/>
+    <p:sldId xmlns:r="http://schemas.openxmlformats.org/officeDocument/2006/relationships" id="266" r:id="R8ce968df2c454cad"/>
+    <p:sldId xmlns:r="http://schemas.openxmlformats.org/officeDocument/2006/relationships" id="267" r:id="Rd173820e3f724a51"/>
+    <p:sldId xmlns:r="http://schemas.openxmlformats.org/officeDocument/2006/relationships" id="268" r:id="R2ad261cd44e748a5"/>
+    <p:sldId xmlns:r="http://schemas.openxmlformats.org/officeDocument/2006/relationships" id="269" r:id="R332ea13d436d4abc"/>
+    <p:sldId xmlns:r="http://schemas.openxmlformats.org/officeDocument/2006/relationships" id="270" r:id="Rb735d2a356dc4209"/>
+    <p:sldId xmlns:r="http://schemas.openxmlformats.org/officeDocument/2006/relationships" id="271" r:id="Rab0f1cc1e30d4f81"/>
+    <p:sldId xmlns:r="http://schemas.openxmlformats.org/officeDocument/2006/relationships" id="272" r:id="R326546dfe97e4ca0"/>
+    <p:sldId xmlns:r="http://schemas.openxmlformats.org/officeDocument/2006/relationships" id="273" r:id="R369dae6117bc4717"/>
   </p:sldIdLst>
   <p:sldSz cx="12192000" cy="6858000"/>
   <p:notesSz cx="6858000" cy="9144000"/>
@@ -2110,8 +2110,8 @@
   </p:cSld>
   <p:clrMap bg1="lt1" tx1="dk1" bg2="lt2" tx2="dk2" accent1="accent1" accent2="accent2" accent3="accent3" accent4="accent4" accent5="accent5" accent6="accent6" hlink="hlink" folHlink="folHlink"/>
   <p:sldLayoutIdLst>
-    <p:sldLayoutId xmlns:r="http://schemas.openxmlformats.org/officeDocument/2006/relationships" id="2147483649" r:id="R76ce869335174bf9"/>
-    <p:sldLayoutId xmlns:r="http://schemas.openxmlformats.org/officeDocument/2006/relationships" id="2147483650" r:id="Raf4c85e4723c4193"/>
+    <p:sldLayoutId xmlns:r="http://schemas.openxmlformats.org/officeDocument/2006/relationships" id="2147483649" r:id="R26d94739caa64277"/>
+    <p:sldLayoutId xmlns:r="http://schemas.openxmlformats.org/officeDocument/2006/relationships" id="2147483650" r:id="R0463c0612be44dee"/>
   </p:sldLayoutIdLst>
   <p:hf sldNum="0" hdr="0" ftr="0" dt="0"/>
   <p:txStyles>
@@ -2682,7 +2682,7 @@
           <p:cNvPr id="2" name="Image 0">
             <a:extLst xmlns:a="http://schemas.openxmlformats.org/drawingml/2006/main">
               <a:ext uri="{FF2B5EF4-FFF2-40B4-BE49-F238E27FC236}">
-                <a16:creationId xmlns:a16="http://schemas.microsoft.com/office/drawing/2014/main" id="{FA7EA061-CB34-475C-831F-596C275878B3}"/>
+                <a16:creationId xmlns:a16="http://schemas.microsoft.com/office/drawing/2014/main" id="{F9E2077C-9A71-44B8-821E-FC3A1054F2E1}"/>
               </a:ext>
             </a:extLst>
           </p:cNvPr>
@@ -2692,7 +2692,7 @@
           <p:nvPr/>
         </p:nvPicPr>
         <p:blipFill>
-          <a:blip xmlns:r="http://schemas.openxmlformats.org/officeDocument/2006/relationships" xmlns:a="http://schemas.openxmlformats.org/drawingml/2006/main" r:embed="R3218dbb5cf444e24"/>
+          <a:blip xmlns:r="http://schemas.openxmlformats.org/officeDocument/2006/relationships" xmlns:a="http://schemas.openxmlformats.org/drawingml/2006/main" r:embed="Rfbc0cff054f54395"/>
           <a:srcRect xmlns:a="http://schemas.openxmlformats.org/drawingml/2006/main" l="0" t="0" r="0" b="0"/>
           <a:stretch xmlns:a="http://schemas.openxmlformats.org/drawingml/2006/main">
             <a:fillRect l="0" t="0" r="0" b="0"/>
@@ -2907,7 +2907,7 @@
           <p:cNvPr id="2" name="Image 0">
             <a:extLst xmlns:a="http://schemas.openxmlformats.org/drawingml/2006/main">
               <a:ext uri="{FF2B5EF4-FFF2-40B4-BE49-F238E27FC236}">
-                <a16:creationId xmlns:a16="http://schemas.microsoft.com/office/drawing/2014/main" id="{2B9E0251-B0A7-47BA-8734-5B682A5F7E57}"/>
+                <a16:creationId xmlns:a16="http://schemas.microsoft.com/office/drawing/2014/main" id="{381F5485-E369-493E-95FA-5DD0CB7AC72C}"/>
               </a:ext>
             </a:extLst>
           </p:cNvPr>
@@ -2917,7 +2917,7 @@
           <p:nvPr/>
         </p:nvPicPr>
         <p:blipFill>
-          <a:blip xmlns:r="http://schemas.openxmlformats.org/officeDocument/2006/relationships" xmlns:a="http://schemas.openxmlformats.org/drawingml/2006/main" r:embed="R711c578e11f64ff1"/>
+          <a:blip xmlns:r="http://schemas.openxmlformats.org/officeDocument/2006/relationships" xmlns:a="http://schemas.openxmlformats.org/drawingml/2006/main" r:embed="R446e10df5b374dc1"/>
           <a:srcRect xmlns:a="http://schemas.openxmlformats.org/drawingml/2006/main" l="0" t="0" r="0" b="0"/>
           <a:stretch xmlns:a="http://schemas.openxmlformats.org/drawingml/2006/main">
             <a:fillRect l="0" t="0" r="0" b="0"/>
@@ -2950,7 +2950,7 @@
         <p:spPr>
           <a:xfrm xmlns:a="http://schemas.openxmlformats.org/drawingml/2006/main">
             <a:off x="594360" y="438912"/>
-            <a:ext cx="10972800" cy="502920"/>
+            <a:ext cx="9673590" cy="502920"/>
           </a:xfrm>
           <a:prstGeom xmlns:a="http://schemas.openxmlformats.org/drawingml/2006/main" prst="rect">
             <a:avLst/>
@@ -2958,7 +2958,9 @@
           <a:noFill xmlns:a="http://schemas.openxmlformats.org/drawingml/2006/main"/>
         </p:spPr>
         <p:txBody>
-          <a:bodyPr xmlns:a="http://schemas.openxmlformats.org/drawingml/2006/main" wrap="square" lIns="0" tIns="0" rIns="0" bIns="0" anchor="ctr"/>
+          <a:bodyPr xmlns:a="http://schemas.openxmlformats.org/drawingml/2006/main" wrap="square" lIns="0" tIns="0" rIns="0" bIns="0" anchor="ctr">
+            <a:normAutofit fontScale="100000"/>
+          </a:bodyPr>
           <a:lstStyle xmlns:a="http://schemas.openxmlformats.org/drawingml/2006/main"/>
           <a:p xmlns:a="http://schemas.openxmlformats.org/drawingml/2006/main">
             <a:pPr marL="0" indent="0">
@@ -2996,7 +2998,7 @@
         <p:spPr>
           <a:xfrm xmlns:a="http://schemas.openxmlformats.org/drawingml/2006/main">
             <a:off x="612648" y="987552"/>
-            <a:ext cx="10881360" cy="320040"/>
+            <a:ext cx="9655302" cy="320040"/>
           </a:xfrm>
           <a:prstGeom xmlns:a="http://schemas.openxmlformats.org/drawingml/2006/main" prst="rect">
             <a:avLst/>
@@ -3004,7 +3006,9 @@
           <a:noFill xmlns:a="http://schemas.openxmlformats.org/drawingml/2006/main"/>
         </p:spPr>
         <p:txBody>
-          <a:bodyPr xmlns:a="http://schemas.openxmlformats.org/drawingml/2006/main" wrap="square" lIns="0" tIns="0" rIns="0" bIns="0" anchor="ctr"/>
+          <a:bodyPr xmlns:a="http://schemas.openxmlformats.org/drawingml/2006/main" wrap="square" lIns="0" tIns="0" rIns="0" bIns="0" anchor="ctr">
+            <a:normAutofit fontScale="100000"/>
+          </a:bodyPr>
           <a:lstStyle xmlns:a="http://schemas.openxmlformats.org/drawingml/2006/main"/>
           <a:p xmlns:a="http://schemas.openxmlformats.org/drawingml/2006/main">
             <a:pPr marL="0" indent="0">
@@ -3126,12 +3130,14 @@
           <a:noFill xmlns:a="http://schemas.openxmlformats.org/drawingml/2006/main"/>
         </p:spPr>
         <p:txBody>
-          <a:bodyPr xmlns:a="http://schemas.openxmlformats.org/drawingml/2006/main" wrap="square" lIns="254" tIns="254" rIns="254" bIns="254" anchor="ctr">
-            <a:normAutofit/>
+          <a:bodyPr xmlns:a="http://schemas.openxmlformats.org/drawingml/2006/main" wrap="square" lIns="0" tIns="0" rIns="0" bIns="0" anchor="t">
+            <a:normAutofit fontScale="100000"/>
           </a:bodyPr>
-          <a:lstStyle xmlns:a="http://schemas.openxmlformats.org/drawingml/2006/main"/>
-          <a:p xmlns:a="http://schemas.openxmlformats.org/drawingml/2006/main">
-            <a:pPr marL="0" indent="0">
+          <a:lstStyle xmlns:a="http://schemas.openxmlformats.org/drawingml/2006/main">
+            <a:defPPr algn="l"/>
+          </a:lstStyle>
+          <a:p xmlns:a="http://schemas.openxmlformats.org/drawingml/2006/main">
+            <a:pPr marL="0" indent="0" algn="l">
               <a:buNone/>
             </a:pPr>
             <a:r>
@@ -3145,7 +3151,7 @@
             <a:endParaRPr sz="1700"/>
           </a:p>
           <a:p xmlns:a="http://schemas.openxmlformats.org/drawingml/2006/main">
-            <a:pPr marL="0" indent="0">
+            <a:pPr marL="0" indent="0" algn="l">
               <a:buNone/>
             </a:pPr>
             <a:r>
@@ -3261,12 +3267,14 @@
           <a:noFill xmlns:a="http://schemas.openxmlformats.org/drawingml/2006/main"/>
         </p:spPr>
         <p:txBody>
-          <a:bodyPr xmlns:a="http://schemas.openxmlformats.org/drawingml/2006/main" wrap="square" lIns="254" tIns="254" rIns="254" bIns="254" anchor="ctr">
-            <a:normAutofit/>
+          <a:bodyPr xmlns:a="http://schemas.openxmlformats.org/drawingml/2006/main" wrap="square" lIns="0" tIns="0" rIns="0" bIns="0" anchor="t">
+            <a:normAutofit fontScale="100000"/>
           </a:bodyPr>
-          <a:lstStyle xmlns:a="http://schemas.openxmlformats.org/drawingml/2006/main"/>
-          <a:p xmlns:a="http://schemas.openxmlformats.org/drawingml/2006/main">
-            <a:pPr marL="0" indent="0">
+          <a:lstStyle xmlns:a="http://schemas.openxmlformats.org/drawingml/2006/main">
+            <a:defPPr algn="l"/>
+          </a:lstStyle>
+          <a:p xmlns:a="http://schemas.openxmlformats.org/drawingml/2006/main">
+            <a:pPr marL="0" indent="0" algn="l">
               <a:buNone/>
             </a:pPr>
             <a:r>
@@ -3280,7 +3288,7 @@
             <a:endParaRPr sz="1700"/>
           </a:p>
           <a:p xmlns:a="http://schemas.openxmlformats.org/drawingml/2006/main">
-            <a:pPr marL="0" indent="0">
+            <a:pPr marL="0" indent="0" algn="l">
               <a:buNone/>
             </a:pPr>
             <a:r>
@@ -3396,12 +3404,14 @@
           <a:noFill xmlns:a="http://schemas.openxmlformats.org/drawingml/2006/main"/>
         </p:spPr>
         <p:txBody>
-          <a:bodyPr xmlns:a="http://schemas.openxmlformats.org/drawingml/2006/main" wrap="square" lIns="254" tIns="254" rIns="254" bIns="254" anchor="ctr">
-            <a:normAutofit/>
+          <a:bodyPr xmlns:a="http://schemas.openxmlformats.org/drawingml/2006/main" wrap="square" lIns="0" tIns="0" rIns="0" bIns="0" anchor="t">
+            <a:normAutofit fontScale="100000"/>
           </a:bodyPr>
-          <a:lstStyle xmlns:a="http://schemas.openxmlformats.org/drawingml/2006/main"/>
-          <a:p xmlns:a="http://schemas.openxmlformats.org/drawingml/2006/main">
-            <a:pPr marL="0" indent="0">
+          <a:lstStyle xmlns:a="http://schemas.openxmlformats.org/drawingml/2006/main">
+            <a:defPPr algn="l"/>
+          </a:lstStyle>
+          <a:p xmlns:a="http://schemas.openxmlformats.org/drawingml/2006/main">
+            <a:pPr marL="0" indent="0" algn="l">
               <a:buNone/>
             </a:pPr>
             <a:r>
@@ -3415,7 +3425,7 @@
             <a:endParaRPr sz="1700"/>
           </a:p>
           <a:p xmlns:a="http://schemas.openxmlformats.org/drawingml/2006/main">
-            <a:pPr marL="0" indent="0">
+            <a:pPr marL="0" indent="0" algn="l">
               <a:buNone/>
             </a:pPr>
             <a:r>
@@ -3531,12 +3541,14 @@
           <a:noFill xmlns:a="http://schemas.openxmlformats.org/drawingml/2006/main"/>
         </p:spPr>
         <p:txBody>
-          <a:bodyPr xmlns:a="http://schemas.openxmlformats.org/drawingml/2006/main" wrap="square" lIns="254" tIns="254" rIns="254" bIns="254" anchor="ctr">
-            <a:normAutofit/>
+          <a:bodyPr xmlns:a="http://schemas.openxmlformats.org/drawingml/2006/main" wrap="square" lIns="0" tIns="0" rIns="0" bIns="0" anchor="t">
+            <a:normAutofit fontScale="100000"/>
           </a:bodyPr>
-          <a:lstStyle xmlns:a="http://schemas.openxmlformats.org/drawingml/2006/main"/>
-          <a:p xmlns:a="http://schemas.openxmlformats.org/drawingml/2006/main">
-            <a:pPr marL="0" indent="0">
+          <a:lstStyle xmlns:a="http://schemas.openxmlformats.org/drawingml/2006/main">
+            <a:defPPr algn="l"/>
+          </a:lstStyle>
+          <a:p xmlns:a="http://schemas.openxmlformats.org/drawingml/2006/main">
+            <a:pPr marL="0" indent="0" algn="l">
               <a:buNone/>
             </a:pPr>
             <a:r>
@@ -3550,7 +3562,7 @@
             <a:endParaRPr sz="1700"/>
           </a:p>
           <a:p xmlns:a="http://schemas.openxmlformats.org/drawingml/2006/main">
-            <a:pPr marL="0" indent="0">
+            <a:pPr marL="0" indent="0" algn="l">
               <a:buNone/>
             </a:pPr>
             <a:r>
@@ -3641,7 +3653,7 @@
           <p:cNvPr id="2" name="Image 0">
             <a:extLst xmlns:a="http://schemas.openxmlformats.org/drawingml/2006/main">
               <a:ext uri="{FF2B5EF4-FFF2-40B4-BE49-F238E27FC236}">
-                <a16:creationId xmlns:a16="http://schemas.microsoft.com/office/drawing/2014/main" id="{80CB4729-D92F-4F00-A678-73F8E53BBB45}"/>
+                <a16:creationId xmlns:a16="http://schemas.microsoft.com/office/drawing/2014/main" id="{01AE4175-D57E-4FA6-ADBC-488B81312AA0}"/>
               </a:ext>
             </a:extLst>
           </p:cNvPr>
@@ -3651,7 +3663,7 @@
           <p:nvPr/>
         </p:nvPicPr>
         <p:blipFill>
-          <a:blip xmlns:r="http://schemas.openxmlformats.org/officeDocument/2006/relationships" xmlns:a="http://schemas.openxmlformats.org/drawingml/2006/main" r:embed="R23cf4d719f694795"/>
+          <a:blip xmlns:r="http://schemas.openxmlformats.org/officeDocument/2006/relationships" xmlns:a="http://schemas.openxmlformats.org/drawingml/2006/main" r:embed="R21dc043261e642ec"/>
           <a:srcRect xmlns:a="http://schemas.openxmlformats.org/drawingml/2006/main" l="0" t="0" r="0" b="0"/>
           <a:stretch xmlns:a="http://schemas.openxmlformats.org/drawingml/2006/main">
             <a:fillRect l="0" t="0" r="0" b="0"/>
@@ -3684,7 +3696,7 @@
         <p:spPr>
           <a:xfrm xmlns:a="http://schemas.openxmlformats.org/drawingml/2006/main">
             <a:off x="594360" y="438912"/>
-            <a:ext cx="10972800" cy="502920"/>
+            <a:ext cx="9673590" cy="502920"/>
           </a:xfrm>
           <a:prstGeom xmlns:a="http://schemas.openxmlformats.org/drawingml/2006/main" prst="rect">
             <a:avLst/>
@@ -3692,7 +3704,9 @@
           <a:noFill xmlns:a="http://schemas.openxmlformats.org/drawingml/2006/main"/>
         </p:spPr>
         <p:txBody>
-          <a:bodyPr xmlns:a="http://schemas.openxmlformats.org/drawingml/2006/main" wrap="square" lIns="0" tIns="0" rIns="0" bIns="0" anchor="ctr"/>
+          <a:bodyPr xmlns:a="http://schemas.openxmlformats.org/drawingml/2006/main" wrap="square" lIns="0" tIns="0" rIns="0" bIns="0" anchor="ctr">
+            <a:normAutofit fontScale="100000"/>
+          </a:bodyPr>
           <a:lstStyle xmlns:a="http://schemas.openxmlformats.org/drawingml/2006/main"/>
           <a:p xmlns:a="http://schemas.openxmlformats.org/drawingml/2006/main">
             <a:pPr marL="0" indent="0">
@@ -3730,7 +3744,7 @@
         <p:spPr>
           <a:xfrm xmlns:a="http://schemas.openxmlformats.org/drawingml/2006/main">
             <a:off x="612648" y="987552"/>
-            <a:ext cx="10881360" cy="320040"/>
+            <a:ext cx="9655302" cy="320040"/>
           </a:xfrm>
           <a:prstGeom xmlns:a="http://schemas.openxmlformats.org/drawingml/2006/main" prst="rect">
             <a:avLst/>
@@ -3738,7 +3752,9 @@
           <a:noFill xmlns:a="http://schemas.openxmlformats.org/drawingml/2006/main"/>
         </p:spPr>
         <p:txBody>
-          <a:bodyPr xmlns:a="http://schemas.openxmlformats.org/drawingml/2006/main" wrap="square" lIns="0" tIns="0" rIns="0" bIns="0" anchor="ctr"/>
+          <a:bodyPr xmlns:a="http://schemas.openxmlformats.org/drawingml/2006/main" wrap="square" lIns="0" tIns="0" rIns="0" bIns="0" anchor="ctr">
+            <a:normAutofit fontScale="100000"/>
+          </a:bodyPr>
           <a:lstStyle xmlns:a="http://schemas.openxmlformats.org/drawingml/2006/main"/>
           <a:p xmlns:a="http://schemas.openxmlformats.org/drawingml/2006/main">
             <a:pPr marL="0" indent="0">
@@ -3784,12 +3800,14 @@
           <a:noFill xmlns:a="http://schemas.openxmlformats.org/drawingml/2006/main"/>
         </p:spPr>
         <p:txBody>
-          <a:bodyPr xmlns:a="http://schemas.openxmlformats.org/drawingml/2006/main" wrap="square" lIns="635" tIns="635" rIns="635" bIns="635" anchor="ctr">
-            <a:normAutofit/>
+          <a:bodyPr xmlns:a="http://schemas.openxmlformats.org/drawingml/2006/main" wrap="square" lIns="0" tIns="0" rIns="0" bIns="0" anchor="t">
+            <a:normAutofit fontScale="100000"/>
           </a:bodyPr>
-          <a:lstStyle xmlns:a="http://schemas.openxmlformats.org/drawingml/2006/main"/>
-          <a:p xmlns:a="http://schemas.openxmlformats.org/drawingml/2006/main">
-            <a:pPr marL="254000" indent="-254000">
+          <a:lstStyle xmlns:a="http://schemas.openxmlformats.org/drawingml/2006/main">
+            <a:defPPr algn="l"/>
+          </a:lstStyle>
+          <a:p xmlns:a="http://schemas.openxmlformats.org/drawingml/2006/main">
+            <a:pPr marL="254000" indent="-254000" algn="l">
               <a:buSzPct val="100000"/>
               <a:buChar char="•"/>
             </a:pPr>
@@ -3807,7 +3825,7 @@
             <a:endParaRPr sz="2200"/>
           </a:p>
           <a:p xmlns:a="http://schemas.openxmlformats.org/drawingml/2006/main">
-            <a:pPr marL="254000" indent="-254000">
+            <a:pPr marL="254000" indent="-254000" algn="l">
               <a:buSzPct val="100000"/>
               <a:buChar char="•"/>
             </a:pPr>
@@ -3825,7 +3843,7 @@
             <a:endParaRPr sz="2200"/>
           </a:p>
           <a:p xmlns:a="http://schemas.openxmlformats.org/drawingml/2006/main">
-            <a:pPr marL="254000" indent="-254000">
+            <a:pPr marL="254000" indent="-254000" algn="l">
               <a:buSzPct val="100000"/>
               <a:buChar char="•"/>
             </a:pPr>
@@ -3843,7 +3861,7 @@
             <a:endParaRPr sz="2200"/>
           </a:p>
           <a:p xmlns:a="http://schemas.openxmlformats.org/drawingml/2006/main">
-            <a:pPr marL="254000" indent="-254000">
+            <a:pPr marL="254000" indent="-254000" algn="l">
               <a:buSzPct val="100000"/>
               <a:buChar char="•"/>
             </a:pPr>
@@ -3938,7 +3956,7 @@
           <p:cNvPr id="2" name="Image 0">
             <a:extLst xmlns:a="http://schemas.openxmlformats.org/drawingml/2006/main">
               <a:ext uri="{FF2B5EF4-FFF2-40B4-BE49-F238E27FC236}">
-                <a16:creationId xmlns:a16="http://schemas.microsoft.com/office/drawing/2014/main" id="{F82EDA54-EFAB-4432-9B53-59BC2F949721}"/>
+                <a16:creationId xmlns:a16="http://schemas.microsoft.com/office/drawing/2014/main" id="{3ECFBA97-AEA7-48DE-95CE-B0A0E347C542}"/>
               </a:ext>
             </a:extLst>
           </p:cNvPr>
@@ -3948,7 +3966,7 @@
           <p:nvPr/>
         </p:nvPicPr>
         <p:blipFill>
-          <a:blip xmlns:r="http://schemas.openxmlformats.org/officeDocument/2006/relationships" xmlns:a="http://schemas.openxmlformats.org/drawingml/2006/main" r:embed="R16a2dbe6f9cc405f"/>
+          <a:blip xmlns:r="http://schemas.openxmlformats.org/officeDocument/2006/relationships" xmlns:a="http://schemas.openxmlformats.org/drawingml/2006/main" r:embed="R11cbb82865cb4930"/>
           <a:srcRect xmlns:a="http://schemas.openxmlformats.org/drawingml/2006/main" l="0" t="0" r="0" b="0"/>
           <a:stretch xmlns:a="http://schemas.openxmlformats.org/drawingml/2006/main">
             <a:fillRect l="0" t="0" r="0" b="0"/>
@@ -3981,7 +3999,7 @@
         <p:spPr>
           <a:xfrm xmlns:a="http://schemas.openxmlformats.org/drawingml/2006/main">
             <a:off x="594360" y="438912"/>
-            <a:ext cx="10972800" cy="502920"/>
+            <a:ext cx="9673590" cy="502920"/>
           </a:xfrm>
           <a:prstGeom xmlns:a="http://schemas.openxmlformats.org/drawingml/2006/main" prst="rect">
             <a:avLst/>
@@ -3989,7 +4007,9 @@
           <a:noFill xmlns:a="http://schemas.openxmlformats.org/drawingml/2006/main"/>
         </p:spPr>
         <p:txBody>
-          <a:bodyPr xmlns:a="http://schemas.openxmlformats.org/drawingml/2006/main" wrap="square" lIns="0" tIns="0" rIns="0" bIns="0" anchor="ctr"/>
+          <a:bodyPr xmlns:a="http://schemas.openxmlformats.org/drawingml/2006/main" wrap="square" lIns="0" tIns="0" rIns="0" bIns="0" anchor="ctr">
+            <a:normAutofit fontScale="100000"/>
+          </a:bodyPr>
           <a:lstStyle xmlns:a="http://schemas.openxmlformats.org/drawingml/2006/main"/>
           <a:p xmlns:a="http://schemas.openxmlformats.org/drawingml/2006/main">
             <a:pPr marL="0" indent="0">
@@ -4027,7 +4047,7 @@
         <p:spPr>
           <a:xfrm xmlns:a="http://schemas.openxmlformats.org/drawingml/2006/main">
             <a:off x="612648" y="987552"/>
-            <a:ext cx="10881360" cy="320040"/>
+            <a:ext cx="9655302" cy="320040"/>
           </a:xfrm>
           <a:prstGeom xmlns:a="http://schemas.openxmlformats.org/drawingml/2006/main" prst="rect">
             <a:avLst/>
@@ -4035,7 +4055,9 @@
           <a:noFill xmlns:a="http://schemas.openxmlformats.org/drawingml/2006/main"/>
         </p:spPr>
         <p:txBody>
-          <a:bodyPr xmlns:a="http://schemas.openxmlformats.org/drawingml/2006/main" wrap="square" lIns="0" tIns="0" rIns="0" bIns="0" anchor="ctr"/>
+          <a:bodyPr xmlns:a="http://schemas.openxmlformats.org/drawingml/2006/main" wrap="square" lIns="0" tIns="0" rIns="0" bIns="0" anchor="ctr">
+            <a:normAutofit fontScale="100000"/>
+          </a:bodyPr>
           <a:lstStyle xmlns:a="http://schemas.openxmlformats.org/drawingml/2006/main"/>
           <a:p xmlns:a="http://schemas.openxmlformats.org/drawingml/2006/main">
             <a:pPr marL="0" indent="0">
@@ -4081,12 +4103,14 @@
           <a:noFill xmlns:a="http://schemas.openxmlformats.org/drawingml/2006/main"/>
         </p:spPr>
         <p:txBody>
-          <a:bodyPr xmlns:a="http://schemas.openxmlformats.org/drawingml/2006/main" wrap="square" lIns="635" tIns="635" rIns="635" bIns="635" anchor="ctr">
-            <a:normAutofit/>
+          <a:bodyPr xmlns:a="http://schemas.openxmlformats.org/drawingml/2006/main" wrap="square" lIns="0" tIns="0" rIns="0" bIns="0" anchor="t">
+            <a:normAutofit fontScale="100000"/>
           </a:bodyPr>
-          <a:lstStyle xmlns:a="http://schemas.openxmlformats.org/drawingml/2006/main"/>
-          <a:p xmlns:a="http://schemas.openxmlformats.org/drawingml/2006/main">
-            <a:pPr marL="254000" indent="-254000">
+          <a:lstStyle xmlns:a="http://schemas.openxmlformats.org/drawingml/2006/main">
+            <a:defPPr algn="l"/>
+          </a:lstStyle>
+          <a:p xmlns:a="http://schemas.openxmlformats.org/drawingml/2006/main">
+            <a:pPr marL="254000" indent="-254000" algn="l">
               <a:buSzPct val="100000"/>
               <a:buChar char="•"/>
             </a:pPr>
@@ -4104,7 +4128,7 @@
             <a:endParaRPr sz="2200"/>
           </a:p>
           <a:p xmlns:a="http://schemas.openxmlformats.org/drawingml/2006/main">
-            <a:pPr marL="254000" indent="-254000">
+            <a:pPr marL="254000" indent="-254000" algn="l">
               <a:buSzPct val="100000"/>
               <a:buChar char="•"/>
             </a:pPr>
@@ -4122,7 +4146,7 @@
             <a:endParaRPr sz="2200"/>
           </a:p>
           <a:p xmlns:a="http://schemas.openxmlformats.org/drawingml/2006/main">
-            <a:pPr marL="254000" indent="-254000">
+            <a:pPr marL="254000" indent="-254000" algn="l">
               <a:buSzPct val="100000"/>
               <a:buChar char="•"/>
             </a:pPr>
@@ -4140,7 +4164,7 @@
             <a:endParaRPr sz="2200"/>
           </a:p>
           <a:p xmlns:a="http://schemas.openxmlformats.org/drawingml/2006/main">
-            <a:pPr marL="254000" indent="-254000">
+            <a:pPr marL="254000" indent="-254000" algn="l">
               <a:buSzPct val="100000"/>
               <a:buChar char="•"/>
             </a:pPr>
@@ -4235,7 +4259,7 @@
           <p:cNvPr id="2" name="Image 0">
             <a:extLst xmlns:a="http://schemas.openxmlformats.org/drawingml/2006/main">
               <a:ext uri="{FF2B5EF4-FFF2-40B4-BE49-F238E27FC236}">
-                <a16:creationId xmlns:a16="http://schemas.microsoft.com/office/drawing/2014/main" id="{FAA8BC23-2FA7-4AB1-A650-206A55127838}"/>
+                <a16:creationId xmlns:a16="http://schemas.microsoft.com/office/drawing/2014/main" id="{47D67373-652B-4027-9DD0-781705972AAE}"/>
               </a:ext>
             </a:extLst>
           </p:cNvPr>
@@ -4245,7 +4269,7 @@
           <p:nvPr/>
         </p:nvPicPr>
         <p:blipFill>
-          <a:blip xmlns:r="http://schemas.openxmlformats.org/officeDocument/2006/relationships" xmlns:a="http://schemas.openxmlformats.org/drawingml/2006/main" r:embed="R95030607153341f0"/>
+          <a:blip xmlns:r="http://schemas.openxmlformats.org/officeDocument/2006/relationships" xmlns:a="http://schemas.openxmlformats.org/drawingml/2006/main" r:embed="R13537c15364a4a50"/>
           <a:srcRect xmlns:a="http://schemas.openxmlformats.org/drawingml/2006/main" l="0" t="0" r="0" b="0"/>
           <a:stretch xmlns:a="http://schemas.openxmlformats.org/drawingml/2006/main">
             <a:fillRect l="0" t="0" r="0" b="0"/>
@@ -4278,7 +4302,7 @@
         <p:spPr>
           <a:xfrm xmlns:a="http://schemas.openxmlformats.org/drawingml/2006/main">
             <a:off x="594360" y="438912"/>
-            <a:ext cx="10972800" cy="502920"/>
+            <a:ext cx="9673590" cy="502920"/>
           </a:xfrm>
           <a:prstGeom xmlns:a="http://schemas.openxmlformats.org/drawingml/2006/main" prst="rect">
             <a:avLst/>
@@ -4286,7 +4310,9 @@
           <a:noFill xmlns:a="http://schemas.openxmlformats.org/drawingml/2006/main"/>
         </p:spPr>
         <p:txBody>
-          <a:bodyPr xmlns:a="http://schemas.openxmlformats.org/drawingml/2006/main" wrap="square" lIns="0" tIns="0" rIns="0" bIns="0" anchor="ctr"/>
+          <a:bodyPr xmlns:a="http://schemas.openxmlformats.org/drawingml/2006/main" wrap="square" lIns="0" tIns="0" rIns="0" bIns="0" anchor="ctr">
+            <a:normAutofit fontScale="100000"/>
+          </a:bodyPr>
           <a:lstStyle xmlns:a="http://schemas.openxmlformats.org/drawingml/2006/main"/>
           <a:p xmlns:a="http://schemas.openxmlformats.org/drawingml/2006/main">
             <a:pPr marL="0" indent="0">
@@ -4324,7 +4350,7 @@
         <p:spPr>
           <a:xfrm xmlns:a="http://schemas.openxmlformats.org/drawingml/2006/main">
             <a:off x="612648" y="987552"/>
-            <a:ext cx="10881360" cy="320040"/>
+            <a:ext cx="9655302" cy="320040"/>
           </a:xfrm>
           <a:prstGeom xmlns:a="http://schemas.openxmlformats.org/drawingml/2006/main" prst="rect">
             <a:avLst/>
@@ -4332,7 +4358,9 @@
           <a:noFill xmlns:a="http://schemas.openxmlformats.org/drawingml/2006/main"/>
         </p:spPr>
         <p:txBody>
-          <a:bodyPr xmlns:a="http://schemas.openxmlformats.org/drawingml/2006/main" wrap="square" lIns="0" tIns="0" rIns="0" bIns="0" anchor="ctr"/>
+          <a:bodyPr xmlns:a="http://schemas.openxmlformats.org/drawingml/2006/main" wrap="square" lIns="0" tIns="0" rIns="0" bIns="0" anchor="ctr">
+            <a:normAutofit fontScale="100000"/>
+          </a:bodyPr>
           <a:lstStyle xmlns:a="http://schemas.openxmlformats.org/drawingml/2006/main"/>
           <a:p xmlns:a="http://schemas.openxmlformats.org/drawingml/2006/main">
             <a:pPr marL="0" indent="0">
@@ -4378,12 +4406,14 @@
           <a:noFill xmlns:a="http://schemas.openxmlformats.org/drawingml/2006/main"/>
         </p:spPr>
         <p:txBody>
-          <a:bodyPr xmlns:a="http://schemas.openxmlformats.org/drawingml/2006/main" wrap="square" lIns="635" tIns="635" rIns="635" bIns="635" anchor="ctr">
-            <a:normAutofit/>
+          <a:bodyPr xmlns:a="http://schemas.openxmlformats.org/drawingml/2006/main" wrap="square" lIns="0" tIns="0" rIns="0" bIns="0" anchor="t">
+            <a:normAutofit fontScale="100000"/>
           </a:bodyPr>
-          <a:lstStyle xmlns:a="http://schemas.openxmlformats.org/drawingml/2006/main"/>
-          <a:p xmlns:a="http://schemas.openxmlformats.org/drawingml/2006/main">
-            <a:pPr marL="254000" indent="-254000">
+          <a:lstStyle xmlns:a="http://schemas.openxmlformats.org/drawingml/2006/main">
+            <a:defPPr algn="l"/>
+          </a:lstStyle>
+          <a:p xmlns:a="http://schemas.openxmlformats.org/drawingml/2006/main">
+            <a:pPr marL="254000" indent="-254000" algn="l">
               <a:buSzPct val="100000"/>
               <a:buChar char="•"/>
             </a:pPr>
@@ -4401,7 +4431,7 @@
             <a:endParaRPr sz="2200"/>
           </a:p>
           <a:p xmlns:a="http://schemas.openxmlformats.org/drawingml/2006/main">
-            <a:pPr marL="254000" indent="-254000">
+            <a:pPr marL="254000" indent="-254000" algn="l">
               <a:buSzPct val="100000"/>
               <a:buChar char="•"/>
             </a:pPr>
@@ -4419,7 +4449,7 @@
             <a:endParaRPr sz="2200"/>
           </a:p>
           <a:p xmlns:a="http://schemas.openxmlformats.org/drawingml/2006/main">
-            <a:pPr marL="254000" indent="-254000">
+            <a:pPr marL="254000" indent="-254000" algn="l">
               <a:buSzPct val="100000"/>
               <a:buChar char="•"/>
             </a:pPr>
@@ -4590,7 +4620,7 @@
           <p:cNvPr id="2" name="Image 0">
             <a:extLst xmlns:a="http://schemas.openxmlformats.org/drawingml/2006/main">
               <a:ext uri="{FF2B5EF4-FFF2-40B4-BE49-F238E27FC236}">
-                <a16:creationId xmlns:a16="http://schemas.microsoft.com/office/drawing/2014/main" id="{B0EC44A1-7725-498D-B92C-38196CB87704}"/>
+                <a16:creationId xmlns:a16="http://schemas.microsoft.com/office/drawing/2014/main" id="{FB90B1F8-19AB-4E6C-8800-D112D8A1419E}"/>
               </a:ext>
             </a:extLst>
           </p:cNvPr>
@@ -4600,7 +4630,7 @@
           <p:nvPr/>
         </p:nvPicPr>
         <p:blipFill>
-          <a:blip xmlns:r="http://schemas.openxmlformats.org/officeDocument/2006/relationships" xmlns:a="http://schemas.openxmlformats.org/drawingml/2006/main" r:embed="R265b3efdf4c345b7"/>
+          <a:blip xmlns:r="http://schemas.openxmlformats.org/officeDocument/2006/relationships" xmlns:a="http://schemas.openxmlformats.org/drawingml/2006/main" r:embed="Rbaecd0d88c2649cb"/>
           <a:srcRect xmlns:a="http://schemas.openxmlformats.org/drawingml/2006/main" l="0" t="0" r="0" b="0"/>
           <a:stretch xmlns:a="http://schemas.openxmlformats.org/drawingml/2006/main">
             <a:fillRect l="0" t="0" r="0" b="0"/>
@@ -4633,7 +4663,7 @@
         <p:spPr>
           <a:xfrm xmlns:a="http://schemas.openxmlformats.org/drawingml/2006/main">
             <a:off x="594360" y="438912"/>
-            <a:ext cx="10972800" cy="502920"/>
+            <a:ext cx="9673590" cy="502920"/>
           </a:xfrm>
           <a:prstGeom xmlns:a="http://schemas.openxmlformats.org/drawingml/2006/main" prst="rect">
             <a:avLst/>
@@ -4641,7 +4671,9 @@
           <a:noFill xmlns:a="http://schemas.openxmlformats.org/drawingml/2006/main"/>
         </p:spPr>
         <p:txBody>
-          <a:bodyPr xmlns:a="http://schemas.openxmlformats.org/drawingml/2006/main" wrap="square" lIns="0" tIns="0" rIns="0" bIns="0" anchor="ctr"/>
+          <a:bodyPr xmlns:a="http://schemas.openxmlformats.org/drawingml/2006/main" wrap="square" lIns="0" tIns="0" rIns="0" bIns="0" anchor="ctr">
+            <a:normAutofit fontScale="100000"/>
+          </a:bodyPr>
           <a:lstStyle xmlns:a="http://schemas.openxmlformats.org/drawingml/2006/main"/>
           <a:p xmlns:a="http://schemas.openxmlformats.org/drawingml/2006/main">
             <a:pPr marL="0" indent="0">
@@ -4679,7 +4711,7 @@
         <p:spPr>
           <a:xfrm xmlns:a="http://schemas.openxmlformats.org/drawingml/2006/main">
             <a:off x="612648" y="987552"/>
-            <a:ext cx="10881360" cy="320040"/>
+            <a:ext cx="9655302" cy="320040"/>
           </a:xfrm>
           <a:prstGeom xmlns:a="http://schemas.openxmlformats.org/drawingml/2006/main" prst="rect">
             <a:avLst/>
@@ -4687,7 +4719,9 @@
           <a:noFill xmlns:a="http://schemas.openxmlformats.org/drawingml/2006/main"/>
         </p:spPr>
         <p:txBody>
-          <a:bodyPr xmlns:a="http://schemas.openxmlformats.org/drawingml/2006/main" wrap="square" lIns="0" tIns="0" rIns="0" bIns="0" anchor="ctr"/>
+          <a:bodyPr xmlns:a="http://schemas.openxmlformats.org/drawingml/2006/main" wrap="square" lIns="0" tIns="0" rIns="0" bIns="0" anchor="ctr">
+            <a:normAutofit fontScale="100000"/>
+          </a:bodyPr>
           <a:lstStyle xmlns:a="http://schemas.openxmlformats.org/drawingml/2006/main"/>
           <a:p xmlns:a="http://schemas.openxmlformats.org/drawingml/2006/main">
             <a:pPr marL="0" indent="0">
@@ -4733,12 +4767,14 @@
           <a:noFill xmlns:a="http://schemas.openxmlformats.org/drawingml/2006/main"/>
         </p:spPr>
         <p:txBody>
-          <a:bodyPr xmlns:a="http://schemas.openxmlformats.org/drawingml/2006/main" wrap="square" lIns="635" tIns="635" rIns="635" bIns="635" anchor="ctr">
-            <a:normAutofit/>
+          <a:bodyPr xmlns:a="http://schemas.openxmlformats.org/drawingml/2006/main" wrap="square" lIns="0" tIns="0" rIns="0" bIns="0" anchor="t">
+            <a:normAutofit fontScale="100000"/>
           </a:bodyPr>
-          <a:lstStyle xmlns:a="http://schemas.openxmlformats.org/drawingml/2006/main"/>
-          <a:p xmlns:a="http://schemas.openxmlformats.org/drawingml/2006/main">
-            <a:pPr marL="254000" indent="-254000">
+          <a:lstStyle xmlns:a="http://schemas.openxmlformats.org/drawingml/2006/main">
+            <a:defPPr algn="l"/>
+          </a:lstStyle>
+          <a:p xmlns:a="http://schemas.openxmlformats.org/drawingml/2006/main">
+            <a:pPr marL="254000" indent="-254000" algn="l">
               <a:buSzPct val="100000"/>
               <a:buChar char="•"/>
             </a:pPr>
@@ -4756,7 +4792,7 @@
             <a:endParaRPr sz="2200"/>
           </a:p>
           <a:p xmlns:a="http://schemas.openxmlformats.org/drawingml/2006/main">
-            <a:pPr marL="254000" indent="-254000">
+            <a:pPr marL="254000" indent="-254000" algn="l">
               <a:buSzPct val="100000"/>
               <a:buChar char="•"/>
             </a:pPr>
@@ -4774,7 +4810,7 @@
             <a:endParaRPr sz="2200"/>
           </a:p>
           <a:p xmlns:a="http://schemas.openxmlformats.org/drawingml/2006/main">
-            <a:pPr marL="254000" indent="-254000">
+            <a:pPr marL="254000" indent="-254000" algn="l">
               <a:buSzPct val="100000"/>
               <a:buChar char="•"/>
             </a:pPr>
@@ -4792,7 +4828,7 @@
             <a:endParaRPr sz="2200"/>
           </a:p>
           <a:p xmlns:a="http://schemas.openxmlformats.org/drawingml/2006/main">
-            <a:pPr marL="254000" indent="-254000">
+            <a:pPr marL="254000" indent="-254000" algn="l">
               <a:buSzPct val="100000"/>
               <a:buChar char="•"/>
             </a:pPr>
@@ -4887,7 +4923,7 @@
           <p:cNvPr id="2" name="Image 0">
             <a:extLst xmlns:a="http://schemas.openxmlformats.org/drawingml/2006/main">
               <a:ext uri="{FF2B5EF4-FFF2-40B4-BE49-F238E27FC236}">
-                <a16:creationId xmlns:a16="http://schemas.microsoft.com/office/drawing/2014/main" id="{4F53CDF1-7BAA-4491-A488-C71C485364D8}"/>
+                <a16:creationId xmlns:a16="http://schemas.microsoft.com/office/drawing/2014/main" id="{69AB0801-3A63-4FFA-9A2F-8A622C5A3A17}"/>
               </a:ext>
             </a:extLst>
           </p:cNvPr>
@@ -4897,7 +4933,7 @@
           <p:nvPr/>
         </p:nvPicPr>
         <p:blipFill>
-          <a:blip xmlns:r="http://schemas.openxmlformats.org/officeDocument/2006/relationships" xmlns:a="http://schemas.openxmlformats.org/drawingml/2006/main" r:embed="R47a54e378df64086"/>
+          <a:blip xmlns:r="http://schemas.openxmlformats.org/officeDocument/2006/relationships" xmlns:a="http://schemas.openxmlformats.org/drawingml/2006/main" r:embed="R47d669e75dff439f"/>
           <a:srcRect xmlns:a="http://schemas.openxmlformats.org/drawingml/2006/main" l="0" t="0" r="0" b="0"/>
           <a:stretch xmlns:a="http://schemas.openxmlformats.org/drawingml/2006/main">
             <a:fillRect l="0" t="0" r="0" b="0"/>
@@ -4930,7 +4966,7 @@
         <p:spPr>
           <a:xfrm xmlns:a="http://schemas.openxmlformats.org/drawingml/2006/main">
             <a:off x="594360" y="438912"/>
-            <a:ext cx="10972800" cy="502920"/>
+            <a:ext cx="9673590" cy="502920"/>
           </a:xfrm>
           <a:prstGeom xmlns:a="http://schemas.openxmlformats.org/drawingml/2006/main" prst="rect">
             <a:avLst/>
@@ -4938,7 +4974,9 @@
           <a:noFill xmlns:a="http://schemas.openxmlformats.org/drawingml/2006/main"/>
         </p:spPr>
         <p:txBody>
-          <a:bodyPr xmlns:a="http://schemas.openxmlformats.org/drawingml/2006/main" wrap="square" lIns="0" tIns="0" rIns="0" bIns="0" anchor="ctr"/>
+          <a:bodyPr xmlns:a="http://schemas.openxmlformats.org/drawingml/2006/main" wrap="square" lIns="0" tIns="0" rIns="0" bIns="0" anchor="ctr">
+            <a:normAutofit fontScale="100000"/>
+          </a:bodyPr>
           <a:lstStyle xmlns:a="http://schemas.openxmlformats.org/drawingml/2006/main"/>
           <a:p xmlns:a="http://schemas.openxmlformats.org/drawingml/2006/main">
             <a:pPr marL="0" indent="0">
@@ -4976,7 +5014,7 @@
         <p:spPr>
           <a:xfrm xmlns:a="http://schemas.openxmlformats.org/drawingml/2006/main">
             <a:off x="612648" y="987552"/>
-            <a:ext cx="10881360" cy="320040"/>
+            <a:ext cx="9655302" cy="320040"/>
           </a:xfrm>
           <a:prstGeom xmlns:a="http://schemas.openxmlformats.org/drawingml/2006/main" prst="rect">
             <a:avLst/>
@@ -4984,7 +5022,9 @@
           <a:noFill xmlns:a="http://schemas.openxmlformats.org/drawingml/2006/main"/>
         </p:spPr>
         <p:txBody>
-          <a:bodyPr xmlns:a="http://schemas.openxmlformats.org/drawingml/2006/main" wrap="square" lIns="0" tIns="0" rIns="0" bIns="0" anchor="ctr"/>
+          <a:bodyPr xmlns:a="http://schemas.openxmlformats.org/drawingml/2006/main" wrap="square" lIns="0" tIns="0" rIns="0" bIns="0" anchor="ctr">
+            <a:normAutofit fontScale="100000"/>
+          </a:bodyPr>
           <a:lstStyle xmlns:a="http://schemas.openxmlformats.org/drawingml/2006/main"/>
           <a:p xmlns:a="http://schemas.openxmlformats.org/drawingml/2006/main">
             <a:pPr marL="0" indent="0">
@@ -5030,12 +5070,14 @@
           <a:noFill xmlns:a="http://schemas.openxmlformats.org/drawingml/2006/main"/>
         </p:spPr>
         <p:txBody>
-          <a:bodyPr xmlns:a="http://schemas.openxmlformats.org/drawingml/2006/main" wrap="square" lIns="635" tIns="635" rIns="635" bIns="635" anchor="ctr">
-            <a:normAutofit/>
+          <a:bodyPr xmlns:a="http://schemas.openxmlformats.org/drawingml/2006/main" wrap="square" lIns="0" tIns="0" rIns="0" bIns="0" anchor="t">
+            <a:normAutofit fontScale="100000"/>
           </a:bodyPr>
-          <a:lstStyle xmlns:a="http://schemas.openxmlformats.org/drawingml/2006/main"/>
-          <a:p xmlns:a="http://schemas.openxmlformats.org/drawingml/2006/main">
-            <a:pPr marL="254000" indent="-254000">
+          <a:lstStyle xmlns:a="http://schemas.openxmlformats.org/drawingml/2006/main">
+            <a:defPPr algn="l"/>
+          </a:lstStyle>
+          <a:p xmlns:a="http://schemas.openxmlformats.org/drawingml/2006/main">
+            <a:pPr marL="254000" indent="-254000" algn="l">
               <a:buSzPct val="100000"/>
               <a:buChar char="•"/>
             </a:pPr>
@@ -5053,7 +5095,7 @@
             <a:endParaRPr sz="2200"/>
           </a:p>
           <a:p xmlns:a="http://schemas.openxmlformats.org/drawingml/2006/main">
-            <a:pPr marL="254000" indent="-254000">
+            <a:pPr marL="254000" indent="-254000" algn="l">
               <a:buSzPct val="100000"/>
               <a:buChar char="•"/>
             </a:pPr>
@@ -5071,7 +5113,7 @@
             <a:endParaRPr sz="2200"/>
           </a:p>
           <a:p xmlns:a="http://schemas.openxmlformats.org/drawingml/2006/main">
-            <a:pPr marL="254000" indent="-254000">
+            <a:pPr marL="254000" indent="-254000" algn="l">
               <a:buSzPct val="100000"/>
               <a:buChar char="•"/>
             </a:pPr>
@@ -5089,7 +5131,7 @@
             <a:endParaRPr sz="2200"/>
           </a:p>
           <a:p xmlns:a="http://schemas.openxmlformats.org/drawingml/2006/main">
-            <a:pPr marL="254000" indent="-254000">
+            <a:pPr marL="254000" indent="-254000" algn="l">
               <a:buSzPct val="100000"/>
               <a:buChar char="•"/>
             </a:pPr>
@@ -5184,7 +5226,7 @@
           <p:cNvPr id="2" name="Image 0">
             <a:extLst xmlns:a="http://schemas.openxmlformats.org/drawingml/2006/main">
               <a:ext uri="{FF2B5EF4-FFF2-40B4-BE49-F238E27FC236}">
-                <a16:creationId xmlns:a16="http://schemas.microsoft.com/office/drawing/2014/main" id="{72AB7B59-A348-413B-BD14-8412C97A52FE}"/>
+                <a16:creationId xmlns:a16="http://schemas.microsoft.com/office/drawing/2014/main" id="{99157F74-7268-4AE3-BE38-7967F013FD14}"/>
               </a:ext>
             </a:extLst>
           </p:cNvPr>
@@ -5194,7 +5236,7 @@
           <p:nvPr/>
         </p:nvPicPr>
         <p:blipFill>
-          <a:blip xmlns:r="http://schemas.openxmlformats.org/officeDocument/2006/relationships" xmlns:a="http://schemas.openxmlformats.org/drawingml/2006/main" r:embed="R5719f2735fcc4e61"/>
+          <a:blip xmlns:r="http://schemas.openxmlformats.org/officeDocument/2006/relationships" xmlns:a="http://schemas.openxmlformats.org/drawingml/2006/main" r:embed="R9acf75f0130d4b5d"/>
           <a:srcRect xmlns:a="http://schemas.openxmlformats.org/drawingml/2006/main" l="0" t="0" r="0" b="0"/>
           <a:stretch xmlns:a="http://schemas.openxmlformats.org/drawingml/2006/main">
             <a:fillRect l="0" t="0" r="0" b="0"/>
@@ -5227,7 +5269,7 @@
         <p:spPr>
           <a:xfrm xmlns:a="http://schemas.openxmlformats.org/drawingml/2006/main">
             <a:off x="594360" y="438912"/>
-            <a:ext cx="10972800" cy="502920"/>
+            <a:ext cx="9673590" cy="502920"/>
           </a:xfrm>
           <a:prstGeom xmlns:a="http://schemas.openxmlformats.org/drawingml/2006/main" prst="rect">
             <a:avLst/>
@@ -5235,7 +5277,9 @@
           <a:noFill xmlns:a="http://schemas.openxmlformats.org/drawingml/2006/main"/>
         </p:spPr>
         <p:txBody>
-          <a:bodyPr xmlns:a="http://schemas.openxmlformats.org/drawingml/2006/main" wrap="square" lIns="0" tIns="0" rIns="0" bIns="0" anchor="ctr"/>
+          <a:bodyPr xmlns:a="http://schemas.openxmlformats.org/drawingml/2006/main" wrap="square" lIns="0" tIns="0" rIns="0" bIns="0" anchor="ctr">
+            <a:normAutofit fontScale="100000"/>
+          </a:bodyPr>
           <a:lstStyle xmlns:a="http://schemas.openxmlformats.org/drawingml/2006/main"/>
           <a:p xmlns:a="http://schemas.openxmlformats.org/drawingml/2006/main">
             <a:pPr marL="0" indent="0">
@@ -5273,7 +5317,7 @@
         <p:spPr>
           <a:xfrm xmlns:a="http://schemas.openxmlformats.org/drawingml/2006/main">
             <a:off x="612648" y="987552"/>
-            <a:ext cx="10881360" cy="320040"/>
+            <a:ext cx="9655302" cy="320040"/>
           </a:xfrm>
           <a:prstGeom xmlns:a="http://schemas.openxmlformats.org/drawingml/2006/main" prst="rect">
             <a:avLst/>
@@ -5281,7 +5325,9 @@
           <a:noFill xmlns:a="http://schemas.openxmlformats.org/drawingml/2006/main"/>
         </p:spPr>
         <p:txBody>
-          <a:bodyPr xmlns:a="http://schemas.openxmlformats.org/drawingml/2006/main" wrap="square" lIns="0" tIns="0" rIns="0" bIns="0" anchor="ctr"/>
+          <a:bodyPr xmlns:a="http://schemas.openxmlformats.org/drawingml/2006/main" wrap="square" lIns="0" tIns="0" rIns="0" bIns="0" anchor="ctr">
+            <a:normAutofit fontScale="100000"/>
+          </a:bodyPr>
           <a:lstStyle xmlns:a="http://schemas.openxmlformats.org/drawingml/2006/main"/>
           <a:p xmlns:a="http://schemas.openxmlformats.org/drawingml/2006/main">
             <a:pPr marL="0" indent="0">
@@ -5327,12 +5373,14 @@
           <a:noFill xmlns:a="http://schemas.openxmlformats.org/drawingml/2006/main"/>
         </p:spPr>
         <p:txBody>
-          <a:bodyPr xmlns:a="http://schemas.openxmlformats.org/drawingml/2006/main" wrap="square" lIns="635" tIns="635" rIns="635" bIns="635" anchor="ctr">
-            <a:normAutofit/>
+          <a:bodyPr xmlns:a="http://schemas.openxmlformats.org/drawingml/2006/main" wrap="square" lIns="0" tIns="0" rIns="0" bIns="0" anchor="t">
+            <a:normAutofit fontScale="100000"/>
           </a:bodyPr>
-          <a:lstStyle xmlns:a="http://schemas.openxmlformats.org/drawingml/2006/main"/>
-          <a:p xmlns:a="http://schemas.openxmlformats.org/drawingml/2006/main">
-            <a:pPr marL="254000" indent="-254000">
+          <a:lstStyle xmlns:a="http://schemas.openxmlformats.org/drawingml/2006/main">
+            <a:defPPr algn="l"/>
+          </a:lstStyle>
+          <a:p xmlns:a="http://schemas.openxmlformats.org/drawingml/2006/main">
+            <a:pPr marL="254000" indent="-254000" algn="l">
               <a:buSzPct val="100000"/>
               <a:buChar char="•"/>
             </a:pPr>
@@ -5350,7 +5398,7 @@
             <a:endParaRPr sz="2200"/>
           </a:p>
           <a:p xmlns:a="http://schemas.openxmlformats.org/drawingml/2006/main">
-            <a:pPr marL="254000" indent="-254000">
+            <a:pPr marL="254000" indent="-254000" algn="l">
               <a:buSzPct val="100000"/>
               <a:buChar char="•"/>
             </a:pPr>
@@ -5368,7 +5416,7 @@
             <a:endParaRPr sz="2200"/>
           </a:p>
           <a:p xmlns:a="http://schemas.openxmlformats.org/drawingml/2006/main">
-            <a:pPr marL="254000" indent="-254000">
+            <a:pPr marL="254000" indent="-254000" algn="l">
               <a:buSzPct val="100000"/>
               <a:buChar char="•"/>
             </a:pPr>
@@ -5386,7 +5434,7 @@
             <a:endParaRPr sz="2200"/>
           </a:p>
           <a:p xmlns:a="http://schemas.openxmlformats.org/drawingml/2006/main">
-            <a:pPr marL="254000" indent="-254000">
+            <a:pPr marL="254000" indent="-254000" algn="l">
               <a:buSzPct val="100000"/>
               <a:buChar char="•"/>
             </a:pPr>
@@ -5404,7 +5452,7 @@
             <a:endParaRPr sz="2200"/>
           </a:p>
           <a:p xmlns:a="http://schemas.openxmlformats.org/drawingml/2006/main">
-            <a:pPr marL="254000" indent="-254000">
+            <a:pPr marL="254000" indent="-254000" algn="l">
               <a:buSzPct val="100000"/>
               <a:buChar char="•"/>
             </a:pPr>
@@ -5499,7 +5547,7 @@
           <p:cNvPr id="2" name="Image 0">
             <a:extLst xmlns:a="http://schemas.openxmlformats.org/drawingml/2006/main">
               <a:ext uri="{FF2B5EF4-FFF2-40B4-BE49-F238E27FC236}">
-                <a16:creationId xmlns:a16="http://schemas.microsoft.com/office/drawing/2014/main" id="{2A0C503A-F3C3-47CE-9244-18EEF36E6B7F}"/>
+                <a16:creationId xmlns:a16="http://schemas.microsoft.com/office/drawing/2014/main" id="{8E9780CD-3E32-45DC-9DE0-91C5B5CC7A29}"/>
               </a:ext>
             </a:extLst>
           </p:cNvPr>
@@ -5509,7 +5557,7 @@
           <p:nvPr/>
         </p:nvPicPr>
         <p:blipFill>
-          <a:blip xmlns:r="http://schemas.openxmlformats.org/officeDocument/2006/relationships" xmlns:a="http://schemas.openxmlformats.org/drawingml/2006/main" r:embed="Rd2c939257d6244ec"/>
+          <a:blip xmlns:r="http://schemas.openxmlformats.org/officeDocument/2006/relationships" xmlns:a="http://schemas.openxmlformats.org/drawingml/2006/main" r:embed="Rb3d29d7323644d02"/>
           <a:srcRect xmlns:a="http://schemas.openxmlformats.org/drawingml/2006/main" l="0" t="0" r="0" b="0"/>
           <a:stretch xmlns:a="http://schemas.openxmlformats.org/drawingml/2006/main">
             <a:fillRect l="0" t="0" r="0" b="0"/>
@@ -5542,7 +5590,7 @@
         <p:spPr>
           <a:xfrm xmlns:a="http://schemas.openxmlformats.org/drawingml/2006/main">
             <a:off x="594360" y="438912"/>
-            <a:ext cx="10972800" cy="502920"/>
+            <a:ext cx="9673590" cy="502920"/>
           </a:xfrm>
           <a:prstGeom xmlns:a="http://schemas.openxmlformats.org/drawingml/2006/main" prst="rect">
             <a:avLst/>
@@ -5550,7 +5598,9 @@
           <a:noFill xmlns:a="http://schemas.openxmlformats.org/drawingml/2006/main"/>
         </p:spPr>
         <p:txBody>
-          <a:bodyPr xmlns:a="http://schemas.openxmlformats.org/drawingml/2006/main" wrap="square" lIns="0" tIns="0" rIns="0" bIns="0" anchor="ctr"/>
+          <a:bodyPr xmlns:a="http://schemas.openxmlformats.org/drawingml/2006/main" wrap="square" lIns="0" tIns="0" rIns="0" bIns="0" anchor="ctr">
+            <a:normAutofit fontScale="100000"/>
+          </a:bodyPr>
           <a:lstStyle xmlns:a="http://schemas.openxmlformats.org/drawingml/2006/main"/>
           <a:p xmlns:a="http://schemas.openxmlformats.org/drawingml/2006/main">
             <a:pPr marL="0" indent="0">
@@ -5588,7 +5638,7 @@
         <p:spPr>
           <a:xfrm xmlns:a="http://schemas.openxmlformats.org/drawingml/2006/main">
             <a:off x="612648" y="987552"/>
-            <a:ext cx="10881360" cy="320040"/>
+            <a:ext cx="9655302" cy="320040"/>
           </a:xfrm>
           <a:prstGeom xmlns:a="http://schemas.openxmlformats.org/drawingml/2006/main" prst="rect">
             <a:avLst/>
@@ -5596,7 +5646,9 @@
           <a:noFill xmlns:a="http://schemas.openxmlformats.org/drawingml/2006/main"/>
         </p:spPr>
         <p:txBody>
-          <a:bodyPr xmlns:a="http://schemas.openxmlformats.org/drawingml/2006/main" wrap="square" lIns="0" tIns="0" rIns="0" bIns="0" anchor="ctr"/>
+          <a:bodyPr xmlns:a="http://schemas.openxmlformats.org/drawingml/2006/main" wrap="square" lIns="0" tIns="0" rIns="0" bIns="0" anchor="ctr">
+            <a:normAutofit fontScale="100000"/>
+          </a:bodyPr>
           <a:lstStyle xmlns:a="http://schemas.openxmlformats.org/drawingml/2006/main"/>
           <a:p xmlns:a="http://schemas.openxmlformats.org/drawingml/2006/main">
             <a:pPr marL="0" indent="0">
@@ -5642,12 +5694,14 @@
           <a:noFill xmlns:a="http://schemas.openxmlformats.org/drawingml/2006/main"/>
         </p:spPr>
         <p:txBody>
-          <a:bodyPr xmlns:a="http://schemas.openxmlformats.org/drawingml/2006/main" wrap="square" lIns="635" tIns="635" rIns="635" bIns="635" anchor="ctr">
-            <a:normAutofit/>
+          <a:bodyPr xmlns:a="http://schemas.openxmlformats.org/drawingml/2006/main" wrap="square" lIns="0" tIns="0" rIns="0" bIns="0" anchor="t">
+            <a:normAutofit fontScale="100000"/>
           </a:bodyPr>
-          <a:lstStyle xmlns:a="http://schemas.openxmlformats.org/drawingml/2006/main"/>
-          <a:p xmlns:a="http://schemas.openxmlformats.org/drawingml/2006/main">
-            <a:pPr marL="254000" indent="-254000">
+          <a:lstStyle xmlns:a="http://schemas.openxmlformats.org/drawingml/2006/main">
+            <a:defPPr algn="l"/>
+          </a:lstStyle>
+          <a:p xmlns:a="http://schemas.openxmlformats.org/drawingml/2006/main">
+            <a:pPr marL="254000" indent="-254000" algn="l">
               <a:buSzPct val="100000"/>
               <a:buChar char="•"/>
             </a:pPr>
@@ -5665,7 +5719,7 @@
             <a:endParaRPr sz="2200"/>
           </a:p>
           <a:p xmlns:a="http://schemas.openxmlformats.org/drawingml/2006/main">
-            <a:pPr marL="254000" indent="-254000">
+            <a:pPr marL="254000" indent="-254000" algn="l">
               <a:buSzPct val="100000"/>
               <a:buChar char="•"/>
             </a:pPr>
@@ -5683,7 +5737,7 @@
             <a:endParaRPr sz="2200"/>
           </a:p>
           <a:p xmlns:a="http://schemas.openxmlformats.org/drawingml/2006/main">
-            <a:pPr marL="254000" indent="-254000">
+            <a:pPr marL="254000" indent="-254000" algn="l">
               <a:buSzPct val="100000"/>
               <a:buChar char="•"/>
             </a:pPr>
@@ -5701,7 +5755,7 @@
             <a:endParaRPr sz="2200"/>
           </a:p>
           <a:p xmlns:a="http://schemas.openxmlformats.org/drawingml/2006/main">
-            <a:pPr marL="254000" indent="-254000">
+            <a:pPr marL="254000" indent="-254000" algn="l">
               <a:buSzPct val="100000"/>
               <a:buChar char="•"/>
             </a:pPr>
@@ -5803,7 +5857,7 @@
           <p:cNvPr id="2" name="Image 0">
             <a:extLst xmlns:a="http://schemas.openxmlformats.org/drawingml/2006/main">
               <a:ext uri="{FF2B5EF4-FFF2-40B4-BE49-F238E27FC236}">
-                <a16:creationId xmlns:a16="http://schemas.microsoft.com/office/drawing/2014/main" id="{FFA4B075-8CCA-4E66-95BB-B19818DED111}"/>
+                <a16:creationId xmlns:a16="http://schemas.microsoft.com/office/drawing/2014/main" id="{05CC48DB-807A-4FEC-A924-BD3EF526C3DB}"/>
               </a:ext>
             </a:extLst>
           </p:cNvPr>
@@ -5813,7 +5867,7 @@
           <p:nvPr/>
         </p:nvPicPr>
         <p:blipFill>
-          <a:blip xmlns:r="http://schemas.openxmlformats.org/officeDocument/2006/relationships" xmlns:a="http://schemas.openxmlformats.org/drawingml/2006/main" r:embed="Ra46bb4b0c2da4ca0"/>
+          <a:blip xmlns:r="http://schemas.openxmlformats.org/officeDocument/2006/relationships" xmlns:a="http://schemas.openxmlformats.org/drawingml/2006/main" r:embed="Rb35e84c0e07e4dfa"/>
           <a:srcRect xmlns:a="http://schemas.openxmlformats.org/drawingml/2006/main" l="0" t="0" r="0" b="0"/>
           <a:stretch xmlns:a="http://schemas.openxmlformats.org/drawingml/2006/main">
             <a:fillRect l="0" t="0" r="0" b="0"/>
@@ -5985,7 +6039,7 @@
           <p:cNvPr id="2" name="Image 0">
             <a:extLst xmlns:a="http://schemas.openxmlformats.org/drawingml/2006/main">
               <a:ext uri="{FF2B5EF4-FFF2-40B4-BE49-F238E27FC236}">
-                <a16:creationId xmlns:a16="http://schemas.microsoft.com/office/drawing/2014/main" id="{FE41E6D4-D008-47C1-969B-1969E23E9FDE}"/>
+                <a16:creationId xmlns:a16="http://schemas.microsoft.com/office/drawing/2014/main" id="{7F534526-4E03-4347-876F-B480529F8B3E}"/>
               </a:ext>
             </a:extLst>
           </p:cNvPr>
@@ -5995,7 +6049,7 @@
           <p:nvPr/>
         </p:nvPicPr>
         <p:blipFill>
-          <a:blip xmlns:r="http://schemas.openxmlformats.org/officeDocument/2006/relationships" xmlns:a="http://schemas.openxmlformats.org/drawingml/2006/main" r:embed="R396ddd3d79794fec"/>
+          <a:blip xmlns:r="http://schemas.openxmlformats.org/officeDocument/2006/relationships" xmlns:a="http://schemas.openxmlformats.org/drawingml/2006/main" r:embed="Rb5773a9f4a8c469e"/>
           <a:srcRect xmlns:a="http://schemas.openxmlformats.org/drawingml/2006/main" l="0" t="0" r="0" b="0"/>
           <a:stretch xmlns:a="http://schemas.openxmlformats.org/drawingml/2006/main">
             <a:fillRect l="0" t="0" r="0" b="0"/>
@@ -6028,7 +6082,7 @@
         <p:spPr>
           <a:xfrm xmlns:a="http://schemas.openxmlformats.org/drawingml/2006/main">
             <a:off x="594360" y="438912"/>
-            <a:ext cx="10972800" cy="502920"/>
+            <a:ext cx="9673590" cy="502920"/>
           </a:xfrm>
           <a:prstGeom xmlns:a="http://schemas.openxmlformats.org/drawingml/2006/main" prst="rect">
             <a:avLst/>
@@ -6036,7 +6090,9 @@
           <a:noFill xmlns:a="http://schemas.openxmlformats.org/drawingml/2006/main"/>
         </p:spPr>
         <p:txBody>
-          <a:bodyPr xmlns:a="http://schemas.openxmlformats.org/drawingml/2006/main" wrap="square" lIns="0" tIns="0" rIns="0" bIns="0" anchor="ctr"/>
+          <a:bodyPr xmlns:a="http://schemas.openxmlformats.org/drawingml/2006/main" wrap="square" lIns="0" tIns="0" rIns="0" bIns="0" anchor="ctr">
+            <a:normAutofit fontScale="100000"/>
+          </a:bodyPr>
           <a:lstStyle xmlns:a="http://schemas.openxmlformats.org/drawingml/2006/main"/>
           <a:p xmlns:a="http://schemas.openxmlformats.org/drawingml/2006/main">
             <a:pPr marL="0" indent="0">
@@ -6074,7 +6130,7 @@
         <p:spPr>
           <a:xfrm xmlns:a="http://schemas.openxmlformats.org/drawingml/2006/main">
             <a:off x="612648" y="987552"/>
-            <a:ext cx="10881360" cy="320040"/>
+            <a:ext cx="9655302" cy="320040"/>
           </a:xfrm>
           <a:prstGeom xmlns:a="http://schemas.openxmlformats.org/drawingml/2006/main" prst="rect">
             <a:avLst/>
@@ -6082,7 +6138,9 @@
           <a:noFill xmlns:a="http://schemas.openxmlformats.org/drawingml/2006/main"/>
         </p:spPr>
         <p:txBody>
-          <a:bodyPr xmlns:a="http://schemas.openxmlformats.org/drawingml/2006/main" wrap="square" lIns="0" tIns="0" rIns="0" bIns="0" anchor="ctr"/>
+          <a:bodyPr xmlns:a="http://schemas.openxmlformats.org/drawingml/2006/main" wrap="square" lIns="0" tIns="0" rIns="0" bIns="0" anchor="ctr">
+            <a:normAutofit fontScale="100000"/>
+          </a:bodyPr>
           <a:lstStyle xmlns:a="http://schemas.openxmlformats.org/drawingml/2006/main"/>
           <a:p xmlns:a="http://schemas.openxmlformats.org/drawingml/2006/main">
             <a:pPr marL="0" indent="0">
@@ -6204,12 +6262,14 @@
           <a:noFill xmlns:a="http://schemas.openxmlformats.org/drawingml/2006/main"/>
         </p:spPr>
         <p:txBody>
-          <a:bodyPr xmlns:a="http://schemas.openxmlformats.org/drawingml/2006/main" wrap="square" lIns="254" tIns="254" rIns="254" bIns="254" anchor="ctr">
-            <a:normAutofit/>
+          <a:bodyPr xmlns:a="http://schemas.openxmlformats.org/drawingml/2006/main" wrap="square" lIns="0" tIns="0" rIns="0" bIns="0" anchor="t">
+            <a:normAutofit fontScale="100000"/>
           </a:bodyPr>
-          <a:lstStyle xmlns:a="http://schemas.openxmlformats.org/drawingml/2006/main"/>
-          <a:p xmlns:a="http://schemas.openxmlformats.org/drawingml/2006/main">
-            <a:pPr marL="0" indent="0">
+          <a:lstStyle xmlns:a="http://schemas.openxmlformats.org/drawingml/2006/main">
+            <a:defPPr algn="l"/>
+          </a:lstStyle>
+          <a:p xmlns:a="http://schemas.openxmlformats.org/drawingml/2006/main">
+            <a:pPr marL="0" indent="0" algn="l">
               <a:buNone/>
             </a:pPr>
             <a:r>
@@ -6376,7 +6436,7 @@
           <p:cNvPr id="2" name="Image 0">
             <a:extLst xmlns:a="http://schemas.openxmlformats.org/drawingml/2006/main">
               <a:ext uri="{FF2B5EF4-FFF2-40B4-BE49-F238E27FC236}">
-                <a16:creationId xmlns:a16="http://schemas.microsoft.com/office/drawing/2014/main" id="{595C16D6-574A-4B42-B0B2-AE471E49D3F4}"/>
+                <a16:creationId xmlns:a16="http://schemas.microsoft.com/office/drawing/2014/main" id="{8436C897-2FE8-4B77-B0BC-6CA4F4B96AAB}"/>
               </a:ext>
             </a:extLst>
           </p:cNvPr>
@@ -6386,7 +6446,7 @@
           <p:nvPr/>
         </p:nvPicPr>
         <p:blipFill>
-          <a:blip xmlns:r="http://schemas.openxmlformats.org/officeDocument/2006/relationships" xmlns:a="http://schemas.openxmlformats.org/drawingml/2006/main" r:embed="R43989155b5314428"/>
+          <a:blip xmlns:r="http://schemas.openxmlformats.org/officeDocument/2006/relationships" xmlns:a="http://schemas.openxmlformats.org/drawingml/2006/main" r:embed="R4141d91ac970475d"/>
           <a:srcRect xmlns:a="http://schemas.openxmlformats.org/drawingml/2006/main" l="0" t="0" r="0" b="0"/>
           <a:stretch xmlns:a="http://schemas.openxmlformats.org/drawingml/2006/main">
             <a:fillRect l="0" t="0" r="0" b="0"/>
@@ -6419,7 +6479,7 @@
         <p:spPr>
           <a:xfrm xmlns:a="http://schemas.openxmlformats.org/drawingml/2006/main">
             <a:off x="594360" y="438912"/>
-            <a:ext cx="10972800" cy="502920"/>
+            <a:ext cx="9673590" cy="502920"/>
           </a:xfrm>
           <a:prstGeom xmlns:a="http://schemas.openxmlformats.org/drawingml/2006/main" prst="rect">
             <a:avLst/>
@@ -6427,7 +6487,9 @@
           <a:noFill xmlns:a="http://schemas.openxmlformats.org/drawingml/2006/main"/>
         </p:spPr>
         <p:txBody>
-          <a:bodyPr xmlns:a="http://schemas.openxmlformats.org/drawingml/2006/main" wrap="square" lIns="0" tIns="0" rIns="0" bIns="0" anchor="ctr"/>
+          <a:bodyPr xmlns:a="http://schemas.openxmlformats.org/drawingml/2006/main" wrap="square" lIns="0" tIns="0" rIns="0" bIns="0" anchor="ctr">
+            <a:normAutofit fontScale="100000"/>
+          </a:bodyPr>
           <a:lstStyle xmlns:a="http://schemas.openxmlformats.org/drawingml/2006/main"/>
           <a:p xmlns:a="http://schemas.openxmlformats.org/drawingml/2006/main">
             <a:pPr marL="0" indent="0">
@@ -6465,7 +6527,7 @@
         <p:spPr>
           <a:xfrm xmlns:a="http://schemas.openxmlformats.org/drawingml/2006/main">
             <a:off x="612648" y="987552"/>
-            <a:ext cx="10881360" cy="320040"/>
+            <a:ext cx="9655302" cy="320040"/>
           </a:xfrm>
           <a:prstGeom xmlns:a="http://schemas.openxmlformats.org/drawingml/2006/main" prst="rect">
             <a:avLst/>
@@ -6473,7 +6535,9 @@
           <a:noFill xmlns:a="http://schemas.openxmlformats.org/drawingml/2006/main"/>
         </p:spPr>
         <p:txBody>
-          <a:bodyPr xmlns:a="http://schemas.openxmlformats.org/drawingml/2006/main" wrap="square" lIns="0" tIns="0" rIns="0" bIns="0" anchor="ctr"/>
+          <a:bodyPr xmlns:a="http://schemas.openxmlformats.org/drawingml/2006/main" wrap="square" lIns="0" tIns="0" rIns="0" bIns="0" anchor="ctr">
+            <a:normAutofit fontScale="100000"/>
+          </a:bodyPr>
           <a:lstStyle xmlns:a="http://schemas.openxmlformats.org/drawingml/2006/main"/>
           <a:p xmlns:a="http://schemas.openxmlformats.org/drawingml/2006/main">
             <a:pPr marL="0" indent="0">
@@ -6519,12 +6583,14 @@
           <a:noFill xmlns:a="http://schemas.openxmlformats.org/drawingml/2006/main"/>
         </p:spPr>
         <p:txBody>
-          <a:bodyPr xmlns:a="http://schemas.openxmlformats.org/drawingml/2006/main" wrap="square" lIns="635" tIns="635" rIns="635" bIns="635" anchor="ctr">
-            <a:normAutofit/>
+          <a:bodyPr xmlns:a="http://schemas.openxmlformats.org/drawingml/2006/main" wrap="square" lIns="0" tIns="0" rIns="0" bIns="0" anchor="t">
+            <a:normAutofit fontScale="100000"/>
           </a:bodyPr>
-          <a:lstStyle xmlns:a="http://schemas.openxmlformats.org/drawingml/2006/main"/>
-          <a:p xmlns:a="http://schemas.openxmlformats.org/drawingml/2006/main">
-            <a:pPr marL="254000" indent="-254000">
+          <a:lstStyle xmlns:a="http://schemas.openxmlformats.org/drawingml/2006/main">
+            <a:defPPr algn="l"/>
+          </a:lstStyle>
+          <a:p xmlns:a="http://schemas.openxmlformats.org/drawingml/2006/main">
+            <a:pPr marL="254000" indent="-254000" algn="l">
               <a:buSzPct val="100000"/>
               <a:buChar char="•"/>
             </a:pPr>
@@ -6542,7 +6608,7 @@
             <a:endParaRPr sz="2200"/>
           </a:p>
           <a:p xmlns:a="http://schemas.openxmlformats.org/drawingml/2006/main">
-            <a:pPr marL="254000" indent="-254000">
+            <a:pPr marL="254000" indent="-254000" algn="l">
               <a:buSzPct val="100000"/>
               <a:buChar char="•"/>
             </a:pPr>
@@ -6560,7 +6626,7 @@
             <a:endParaRPr sz="2200"/>
           </a:p>
           <a:p xmlns:a="http://schemas.openxmlformats.org/drawingml/2006/main">
-            <a:pPr marL="254000" indent="-254000">
+            <a:pPr marL="254000" indent="-254000" algn="l">
               <a:buSzPct val="100000"/>
               <a:buChar char="•"/>
             </a:pPr>
@@ -6655,7 +6721,7 @@
           <p:cNvPr id="2" name="Image 0">
             <a:extLst xmlns:a="http://schemas.openxmlformats.org/drawingml/2006/main">
               <a:ext uri="{FF2B5EF4-FFF2-40B4-BE49-F238E27FC236}">
-                <a16:creationId xmlns:a16="http://schemas.microsoft.com/office/drawing/2014/main" id="{946B34D1-A975-469A-90F1-BA8226AB8597}"/>
+                <a16:creationId xmlns:a16="http://schemas.microsoft.com/office/drawing/2014/main" id="{54B2EADB-CB36-4996-91F5-DB8E954C0E81}"/>
               </a:ext>
             </a:extLst>
           </p:cNvPr>
@@ -6665,7 +6731,7 @@
           <p:nvPr/>
         </p:nvPicPr>
         <p:blipFill>
-          <a:blip xmlns:r="http://schemas.openxmlformats.org/officeDocument/2006/relationships" xmlns:a="http://schemas.openxmlformats.org/drawingml/2006/main" r:embed="R888573b1d79a4096"/>
+          <a:blip xmlns:r="http://schemas.openxmlformats.org/officeDocument/2006/relationships" xmlns:a="http://schemas.openxmlformats.org/drawingml/2006/main" r:embed="Ra9db6ab23c8f475d"/>
           <a:srcRect xmlns:a="http://schemas.openxmlformats.org/drawingml/2006/main" l="0" t="0" r="0" b="0"/>
           <a:stretch xmlns:a="http://schemas.openxmlformats.org/drawingml/2006/main">
             <a:fillRect l="0" t="0" r="0" b="0"/>
@@ -6698,7 +6764,7 @@
         <p:spPr>
           <a:xfrm xmlns:a="http://schemas.openxmlformats.org/drawingml/2006/main">
             <a:off x="594360" y="438912"/>
-            <a:ext cx="10972800" cy="502920"/>
+            <a:ext cx="9673590" cy="502920"/>
           </a:xfrm>
           <a:prstGeom xmlns:a="http://schemas.openxmlformats.org/drawingml/2006/main" prst="rect">
             <a:avLst/>
@@ -6706,7 +6772,9 @@
           <a:noFill xmlns:a="http://schemas.openxmlformats.org/drawingml/2006/main"/>
         </p:spPr>
         <p:txBody>
-          <a:bodyPr xmlns:a="http://schemas.openxmlformats.org/drawingml/2006/main" wrap="square" lIns="0" tIns="0" rIns="0" bIns="0" anchor="ctr"/>
+          <a:bodyPr xmlns:a="http://schemas.openxmlformats.org/drawingml/2006/main" wrap="square" lIns="0" tIns="0" rIns="0" bIns="0" anchor="ctr">
+            <a:normAutofit fontScale="100000"/>
+          </a:bodyPr>
           <a:lstStyle xmlns:a="http://schemas.openxmlformats.org/drawingml/2006/main"/>
           <a:p xmlns:a="http://schemas.openxmlformats.org/drawingml/2006/main">
             <a:pPr marL="0" indent="0">
@@ -6744,7 +6812,7 @@
         <p:spPr>
           <a:xfrm xmlns:a="http://schemas.openxmlformats.org/drawingml/2006/main">
             <a:off x="612648" y="987552"/>
-            <a:ext cx="10881360" cy="320040"/>
+            <a:ext cx="9655302" cy="320040"/>
           </a:xfrm>
           <a:prstGeom xmlns:a="http://schemas.openxmlformats.org/drawingml/2006/main" prst="rect">
             <a:avLst/>
@@ -6752,7 +6820,9 @@
           <a:noFill xmlns:a="http://schemas.openxmlformats.org/drawingml/2006/main"/>
         </p:spPr>
         <p:txBody>
-          <a:bodyPr xmlns:a="http://schemas.openxmlformats.org/drawingml/2006/main" wrap="square" lIns="0" tIns="0" rIns="0" bIns="0" anchor="ctr"/>
+          <a:bodyPr xmlns:a="http://schemas.openxmlformats.org/drawingml/2006/main" wrap="square" lIns="0" tIns="0" rIns="0" bIns="0" anchor="ctr">
+            <a:normAutofit fontScale="100000"/>
+          </a:bodyPr>
           <a:lstStyle xmlns:a="http://schemas.openxmlformats.org/drawingml/2006/main"/>
           <a:p xmlns:a="http://schemas.openxmlformats.org/drawingml/2006/main">
             <a:pPr marL="0" indent="0">
@@ -6874,12 +6944,14 @@
           <a:noFill xmlns:a="http://schemas.openxmlformats.org/drawingml/2006/main"/>
         </p:spPr>
         <p:txBody>
-          <a:bodyPr xmlns:a="http://schemas.openxmlformats.org/drawingml/2006/main" wrap="square" lIns="254" tIns="254" rIns="254" bIns="254" anchor="ctr">
-            <a:normAutofit/>
+          <a:bodyPr xmlns:a="http://schemas.openxmlformats.org/drawingml/2006/main" wrap="square" lIns="0" tIns="0" rIns="0" bIns="0" anchor="t">
+            <a:normAutofit fontScale="100000"/>
           </a:bodyPr>
-          <a:lstStyle xmlns:a="http://schemas.openxmlformats.org/drawingml/2006/main"/>
-          <a:p xmlns:a="http://schemas.openxmlformats.org/drawingml/2006/main">
-            <a:pPr marL="0" indent="0">
+          <a:lstStyle xmlns:a="http://schemas.openxmlformats.org/drawingml/2006/main">
+            <a:defPPr algn="l"/>
+          </a:lstStyle>
+          <a:p xmlns:a="http://schemas.openxmlformats.org/drawingml/2006/main">
+            <a:pPr marL="0" indent="0" algn="l">
               <a:buNone/>
             </a:pPr>
             <a:r>
@@ -6893,7 +6965,7 @@
             <a:endParaRPr sz="1700"/>
           </a:p>
           <a:p xmlns:a="http://schemas.openxmlformats.org/drawingml/2006/main">
-            <a:pPr marL="0" indent="0">
+            <a:pPr marL="0" indent="0" algn="l">
               <a:buNone/>
             </a:pPr>
             <a:r>
@@ -6907,7 +6979,7 @@
             <a:endParaRPr sz="1700"/>
           </a:p>
           <a:p xmlns:a="http://schemas.openxmlformats.org/drawingml/2006/main">
-            <a:pPr marL="0" indent="0">
+            <a:pPr marL="0" indent="0" algn="l">
               <a:buNone/>
             </a:pPr>
             <a:r>
@@ -6921,7 +6993,7 @@
             <a:endParaRPr sz="1700"/>
           </a:p>
           <a:p xmlns:a="http://schemas.openxmlformats.org/drawingml/2006/main">
-            <a:pPr marL="0" indent="0">
+            <a:pPr marL="0" indent="0" algn="l">
               <a:buNone/>
             </a:pPr>
             <a:r>
@@ -7037,12 +7109,14 @@
           <a:noFill xmlns:a="http://schemas.openxmlformats.org/drawingml/2006/main"/>
         </p:spPr>
         <p:txBody>
-          <a:bodyPr xmlns:a="http://schemas.openxmlformats.org/drawingml/2006/main" wrap="square" lIns="254" tIns="254" rIns="254" bIns="254" anchor="ctr">
-            <a:normAutofit/>
+          <a:bodyPr xmlns:a="http://schemas.openxmlformats.org/drawingml/2006/main" wrap="square" lIns="0" tIns="0" rIns="0" bIns="0" anchor="t">
+            <a:normAutofit fontScale="100000"/>
           </a:bodyPr>
-          <a:lstStyle xmlns:a="http://schemas.openxmlformats.org/drawingml/2006/main"/>
-          <a:p xmlns:a="http://schemas.openxmlformats.org/drawingml/2006/main">
-            <a:pPr marL="0" indent="0">
+          <a:lstStyle xmlns:a="http://schemas.openxmlformats.org/drawingml/2006/main">
+            <a:defPPr algn="l"/>
+          </a:lstStyle>
+          <a:p xmlns:a="http://schemas.openxmlformats.org/drawingml/2006/main">
+            <a:pPr marL="0" indent="0" algn="l">
               <a:buNone/>
             </a:pPr>
             <a:r>
@@ -7056,7 +7130,7 @@
             <a:endParaRPr sz="1700"/>
           </a:p>
           <a:p xmlns:a="http://schemas.openxmlformats.org/drawingml/2006/main">
-            <a:pPr marL="0" indent="0">
+            <a:pPr marL="0" indent="0" algn="l">
               <a:buNone/>
             </a:pPr>
             <a:r>
@@ -7070,7 +7144,7 @@
             <a:endParaRPr sz="1700"/>
           </a:p>
           <a:p xmlns:a="http://schemas.openxmlformats.org/drawingml/2006/main">
-            <a:pPr marL="0" indent="0">
+            <a:pPr marL="0" indent="0" algn="l">
               <a:buNone/>
             </a:pPr>
             <a:r>
@@ -7084,7 +7158,7 @@
             <a:endParaRPr sz="1700"/>
           </a:p>
           <a:p xmlns:a="http://schemas.openxmlformats.org/drawingml/2006/main">
-            <a:pPr marL="0" indent="0">
+            <a:pPr marL="0" indent="0" algn="l">
               <a:buNone/>
             </a:pPr>
             <a:r>
@@ -7175,7 +7249,7 @@
           <p:cNvPr id="2" name="Image 0">
             <a:extLst xmlns:a="http://schemas.openxmlformats.org/drawingml/2006/main">
               <a:ext uri="{FF2B5EF4-FFF2-40B4-BE49-F238E27FC236}">
-                <a16:creationId xmlns:a16="http://schemas.microsoft.com/office/drawing/2014/main" id="{DAC4BC91-9C8D-4833-9246-BAF365BEA4AF}"/>
+                <a16:creationId xmlns:a16="http://schemas.microsoft.com/office/drawing/2014/main" id="{440D594A-2926-4EA1-A217-2D3361F57FFE}"/>
               </a:ext>
             </a:extLst>
           </p:cNvPr>
@@ -7185,7 +7259,7 @@
           <p:nvPr/>
         </p:nvPicPr>
         <p:blipFill>
-          <a:blip xmlns:r="http://schemas.openxmlformats.org/officeDocument/2006/relationships" xmlns:a="http://schemas.openxmlformats.org/drawingml/2006/main" r:embed="Raf2acd07024548d7"/>
+          <a:blip xmlns:r="http://schemas.openxmlformats.org/officeDocument/2006/relationships" xmlns:a="http://schemas.openxmlformats.org/drawingml/2006/main" r:embed="Re757d83e57094798"/>
           <a:srcRect xmlns:a="http://schemas.openxmlformats.org/drawingml/2006/main" l="0" t="0" r="0" b="0"/>
           <a:stretch xmlns:a="http://schemas.openxmlformats.org/drawingml/2006/main">
             <a:fillRect l="0" t="0" r="0" b="0"/>
@@ -7218,7 +7292,7 @@
         <p:spPr>
           <a:xfrm xmlns:a="http://schemas.openxmlformats.org/drawingml/2006/main">
             <a:off x="594360" y="438912"/>
-            <a:ext cx="10972800" cy="502920"/>
+            <a:ext cx="9673590" cy="502920"/>
           </a:xfrm>
           <a:prstGeom xmlns:a="http://schemas.openxmlformats.org/drawingml/2006/main" prst="rect">
             <a:avLst/>
@@ -7226,7 +7300,9 @@
           <a:noFill xmlns:a="http://schemas.openxmlformats.org/drawingml/2006/main"/>
         </p:spPr>
         <p:txBody>
-          <a:bodyPr xmlns:a="http://schemas.openxmlformats.org/drawingml/2006/main" wrap="square" lIns="0" tIns="0" rIns="0" bIns="0" anchor="ctr"/>
+          <a:bodyPr xmlns:a="http://schemas.openxmlformats.org/drawingml/2006/main" wrap="square" lIns="0" tIns="0" rIns="0" bIns="0" anchor="ctr">
+            <a:normAutofit fontScale="100000"/>
+          </a:bodyPr>
           <a:lstStyle xmlns:a="http://schemas.openxmlformats.org/drawingml/2006/main"/>
           <a:p xmlns:a="http://schemas.openxmlformats.org/drawingml/2006/main">
             <a:pPr marL="0" indent="0">
@@ -7264,7 +7340,7 @@
         <p:spPr>
           <a:xfrm xmlns:a="http://schemas.openxmlformats.org/drawingml/2006/main">
             <a:off x="612648" y="987552"/>
-            <a:ext cx="10881360" cy="320040"/>
+            <a:ext cx="9655302" cy="320040"/>
           </a:xfrm>
           <a:prstGeom xmlns:a="http://schemas.openxmlformats.org/drawingml/2006/main" prst="rect">
             <a:avLst/>
@@ -7272,7 +7348,9 @@
           <a:noFill xmlns:a="http://schemas.openxmlformats.org/drawingml/2006/main"/>
         </p:spPr>
         <p:txBody>
-          <a:bodyPr xmlns:a="http://schemas.openxmlformats.org/drawingml/2006/main" wrap="square" lIns="0" tIns="0" rIns="0" bIns="0" anchor="ctr"/>
+          <a:bodyPr xmlns:a="http://schemas.openxmlformats.org/drawingml/2006/main" wrap="square" lIns="0" tIns="0" rIns="0" bIns="0" anchor="ctr">
+            <a:normAutofit fontScale="100000"/>
+          </a:bodyPr>
           <a:lstStyle xmlns:a="http://schemas.openxmlformats.org/drawingml/2006/main"/>
           <a:p xmlns:a="http://schemas.openxmlformats.org/drawingml/2006/main">
             <a:pPr marL="0" indent="0">
@@ -7921,7 +7999,7 @@
           <p:cNvPr id="2" name="Image 0">
             <a:extLst xmlns:a="http://schemas.openxmlformats.org/drawingml/2006/main">
               <a:ext uri="{FF2B5EF4-FFF2-40B4-BE49-F238E27FC236}">
-                <a16:creationId xmlns:a16="http://schemas.microsoft.com/office/drawing/2014/main" id="{3BC834FD-3C3C-4A41-981C-6391C62DF2CF}"/>
+                <a16:creationId xmlns:a16="http://schemas.microsoft.com/office/drawing/2014/main" id="{046BF4A6-48DE-4420-8BE9-F5952831DB92}"/>
               </a:ext>
             </a:extLst>
           </p:cNvPr>
@@ -7931,7 +8009,7 @@
           <p:nvPr/>
         </p:nvPicPr>
         <p:blipFill>
-          <a:blip xmlns:r="http://schemas.openxmlformats.org/officeDocument/2006/relationships" xmlns:a="http://schemas.openxmlformats.org/drawingml/2006/main" r:embed="R69d7654a69b448df"/>
+          <a:blip xmlns:r="http://schemas.openxmlformats.org/officeDocument/2006/relationships" xmlns:a="http://schemas.openxmlformats.org/drawingml/2006/main" r:embed="R429a9d42c0934f99"/>
           <a:srcRect xmlns:a="http://schemas.openxmlformats.org/drawingml/2006/main" l="0" t="0" r="0" b="0"/>
           <a:stretch xmlns:a="http://schemas.openxmlformats.org/drawingml/2006/main">
             <a:fillRect l="0" t="0" r="0" b="0"/>
@@ -7964,7 +8042,7 @@
         <p:spPr>
           <a:xfrm xmlns:a="http://schemas.openxmlformats.org/drawingml/2006/main">
             <a:off x="594360" y="438912"/>
-            <a:ext cx="10972800" cy="502920"/>
+            <a:ext cx="9673590" cy="502920"/>
           </a:xfrm>
           <a:prstGeom xmlns:a="http://schemas.openxmlformats.org/drawingml/2006/main" prst="rect">
             <a:avLst/>
@@ -7972,7 +8050,9 @@
           <a:noFill xmlns:a="http://schemas.openxmlformats.org/drawingml/2006/main"/>
         </p:spPr>
         <p:txBody>
-          <a:bodyPr xmlns:a="http://schemas.openxmlformats.org/drawingml/2006/main" wrap="square" lIns="0" tIns="0" rIns="0" bIns="0" anchor="ctr"/>
+          <a:bodyPr xmlns:a="http://schemas.openxmlformats.org/drawingml/2006/main" wrap="square" lIns="0" tIns="0" rIns="0" bIns="0" anchor="ctr">
+            <a:normAutofit fontScale="100000"/>
+          </a:bodyPr>
           <a:lstStyle xmlns:a="http://schemas.openxmlformats.org/drawingml/2006/main"/>
           <a:p xmlns:a="http://schemas.openxmlformats.org/drawingml/2006/main">
             <a:pPr marL="0" indent="0">
@@ -8010,7 +8090,7 @@
         <p:spPr>
           <a:xfrm xmlns:a="http://schemas.openxmlformats.org/drawingml/2006/main">
             <a:off x="612648" y="987552"/>
-            <a:ext cx="10881360" cy="320040"/>
+            <a:ext cx="9655302" cy="320040"/>
           </a:xfrm>
           <a:prstGeom xmlns:a="http://schemas.openxmlformats.org/drawingml/2006/main" prst="rect">
             <a:avLst/>
@@ -8018,7 +8098,9 @@
           <a:noFill xmlns:a="http://schemas.openxmlformats.org/drawingml/2006/main"/>
         </p:spPr>
         <p:txBody>
-          <a:bodyPr xmlns:a="http://schemas.openxmlformats.org/drawingml/2006/main" wrap="square" lIns="0" tIns="0" rIns="0" bIns="0" anchor="ctr"/>
+          <a:bodyPr xmlns:a="http://schemas.openxmlformats.org/drawingml/2006/main" wrap="square" lIns="0" tIns="0" rIns="0" bIns="0" anchor="ctr">
+            <a:normAutofit fontScale="100000"/>
+          </a:bodyPr>
           <a:lstStyle xmlns:a="http://schemas.openxmlformats.org/drawingml/2006/main"/>
           <a:p xmlns:a="http://schemas.openxmlformats.org/drawingml/2006/main">
             <a:pPr marL="0" indent="0">
@@ -8064,12 +8146,14 @@
           <a:noFill xmlns:a="http://schemas.openxmlformats.org/drawingml/2006/main"/>
         </p:spPr>
         <p:txBody>
-          <a:bodyPr xmlns:a="http://schemas.openxmlformats.org/drawingml/2006/main" wrap="square" lIns="635" tIns="635" rIns="635" bIns="635" anchor="ctr">
-            <a:normAutofit/>
+          <a:bodyPr xmlns:a="http://schemas.openxmlformats.org/drawingml/2006/main" wrap="square" lIns="0" tIns="0" rIns="0" bIns="0" anchor="t">
+            <a:normAutofit fontScale="100000"/>
           </a:bodyPr>
-          <a:lstStyle xmlns:a="http://schemas.openxmlformats.org/drawingml/2006/main"/>
-          <a:p xmlns:a="http://schemas.openxmlformats.org/drawingml/2006/main">
-            <a:pPr marL="254000" indent="-254000">
+          <a:lstStyle xmlns:a="http://schemas.openxmlformats.org/drawingml/2006/main">
+            <a:defPPr algn="l"/>
+          </a:lstStyle>
+          <a:p xmlns:a="http://schemas.openxmlformats.org/drawingml/2006/main">
+            <a:pPr marL="254000" indent="-254000" algn="l">
               <a:buSzPct val="100000"/>
               <a:buChar char="•"/>
             </a:pPr>
@@ -8087,7 +8171,7 @@
             <a:endParaRPr sz="2200"/>
           </a:p>
           <a:p xmlns:a="http://schemas.openxmlformats.org/drawingml/2006/main">
-            <a:pPr marL="254000" indent="-254000">
+            <a:pPr marL="254000" indent="-254000" algn="l">
               <a:buSzPct val="100000"/>
               <a:buChar char="•"/>
             </a:pPr>
@@ -8105,7 +8189,7 @@
             <a:endParaRPr sz="2200"/>
           </a:p>
           <a:p xmlns:a="http://schemas.openxmlformats.org/drawingml/2006/main">
-            <a:pPr marL="254000" indent="-254000">
+            <a:pPr marL="254000" indent="-254000" algn="l">
               <a:buSzPct val="100000"/>
               <a:buChar char="•"/>
             </a:pPr>
@@ -8123,7 +8207,7 @@
             <a:endParaRPr sz="2200"/>
           </a:p>
           <a:p xmlns:a="http://schemas.openxmlformats.org/drawingml/2006/main">
-            <a:pPr marL="254000" indent="-254000">
+            <a:pPr marL="254000" indent="-254000" algn="l">
               <a:buSzPct val="100000"/>
               <a:buChar char="•"/>
             </a:pPr>
@@ -8218,7 +8302,7 @@
           <p:cNvPr id="2" name="Image 0">
             <a:extLst xmlns:a="http://schemas.openxmlformats.org/drawingml/2006/main">
               <a:ext uri="{FF2B5EF4-FFF2-40B4-BE49-F238E27FC236}">
-                <a16:creationId xmlns:a16="http://schemas.microsoft.com/office/drawing/2014/main" id="{DDCD1B0C-3D21-424C-A9FE-19A606A7A9C5}"/>
+                <a16:creationId xmlns:a16="http://schemas.microsoft.com/office/drawing/2014/main" id="{F9F2C666-8304-4D61-B90D-FA40377195F9}"/>
               </a:ext>
             </a:extLst>
           </p:cNvPr>
@@ -8228,7 +8312,7 @@
           <p:nvPr/>
         </p:nvPicPr>
         <p:blipFill>
-          <a:blip xmlns:r="http://schemas.openxmlformats.org/officeDocument/2006/relationships" xmlns:a="http://schemas.openxmlformats.org/drawingml/2006/main" r:embed="R55bd89c243874671"/>
+          <a:blip xmlns:r="http://schemas.openxmlformats.org/officeDocument/2006/relationships" xmlns:a="http://schemas.openxmlformats.org/drawingml/2006/main" r:embed="Ra378b1fbd373430b"/>
           <a:srcRect xmlns:a="http://schemas.openxmlformats.org/drawingml/2006/main" l="0" t="0" r="0" b="0"/>
           <a:stretch xmlns:a="http://schemas.openxmlformats.org/drawingml/2006/main">
             <a:fillRect l="0" t="0" r="0" b="0"/>
@@ -8261,7 +8345,7 @@
         <p:spPr>
           <a:xfrm xmlns:a="http://schemas.openxmlformats.org/drawingml/2006/main">
             <a:off x="594360" y="438912"/>
-            <a:ext cx="10972800" cy="502920"/>
+            <a:ext cx="9673590" cy="502920"/>
           </a:xfrm>
           <a:prstGeom xmlns:a="http://schemas.openxmlformats.org/drawingml/2006/main" prst="rect">
             <a:avLst/>
@@ -8269,7 +8353,9 @@
           <a:noFill xmlns:a="http://schemas.openxmlformats.org/drawingml/2006/main"/>
         </p:spPr>
         <p:txBody>
-          <a:bodyPr xmlns:a="http://schemas.openxmlformats.org/drawingml/2006/main" wrap="square" lIns="0" tIns="0" rIns="0" bIns="0" anchor="ctr"/>
+          <a:bodyPr xmlns:a="http://schemas.openxmlformats.org/drawingml/2006/main" wrap="square" lIns="0" tIns="0" rIns="0" bIns="0" anchor="ctr">
+            <a:normAutofit fontScale="100000"/>
+          </a:bodyPr>
           <a:lstStyle xmlns:a="http://schemas.openxmlformats.org/drawingml/2006/main"/>
           <a:p xmlns:a="http://schemas.openxmlformats.org/drawingml/2006/main">
             <a:pPr marL="0" indent="0">
@@ -8307,7 +8393,7 @@
         <p:spPr>
           <a:xfrm xmlns:a="http://schemas.openxmlformats.org/drawingml/2006/main">
             <a:off x="612648" y="987552"/>
-            <a:ext cx="10881360" cy="320040"/>
+            <a:ext cx="9655302" cy="320040"/>
           </a:xfrm>
           <a:prstGeom xmlns:a="http://schemas.openxmlformats.org/drawingml/2006/main" prst="rect">
             <a:avLst/>
@@ -8315,7 +8401,9 @@
           <a:noFill xmlns:a="http://schemas.openxmlformats.org/drawingml/2006/main"/>
         </p:spPr>
         <p:txBody>
-          <a:bodyPr xmlns:a="http://schemas.openxmlformats.org/drawingml/2006/main" wrap="square" lIns="0" tIns="0" rIns="0" bIns="0" anchor="ctr"/>
+          <a:bodyPr xmlns:a="http://schemas.openxmlformats.org/drawingml/2006/main" wrap="square" lIns="0" tIns="0" rIns="0" bIns="0" anchor="ctr">
+            <a:normAutofit fontScale="100000"/>
+          </a:bodyPr>
           <a:lstStyle xmlns:a="http://schemas.openxmlformats.org/drawingml/2006/main"/>
           <a:p xmlns:a="http://schemas.openxmlformats.org/drawingml/2006/main">
             <a:pPr marL="0" indent="0">
@@ -8361,12 +8449,14 @@
           <a:noFill xmlns:a="http://schemas.openxmlformats.org/drawingml/2006/main"/>
         </p:spPr>
         <p:txBody>
-          <a:bodyPr xmlns:a="http://schemas.openxmlformats.org/drawingml/2006/main" wrap="square" lIns="635" tIns="635" rIns="635" bIns="635" anchor="ctr">
-            <a:normAutofit/>
+          <a:bodyPr xmlns:a="http://schemas.openxmlformats.org/drawingml/2006/main" wrap="square" lIns="0" tIns="0" rIns="0" bIns="0" anchor="t">
+            <a:normAutofit fontScale="100000"/>
           </a:bodyPr>
-          <a:lstStyle xmlns:a="http://schemas.openxmlformats.org/drawingml/2006/main"/>
-          <a:p xmlns:a="http://schemas.openxmlformats.org/drawingml/2006/main">
-            <a:pPr marL="254000" indent="-254000">
+          <a:lstStyle xmlns:a="http://schemas.openxmlformats.org/drawingml/2006/main">
+            <a:defPPr algn="l"/>
+          </a:lstStyle>
+          <a:p xmlns:a="http://schemas.openxmlformats.org/drawingml/2006/main">
+            <a:pPr marL="254000" indent="-254000" algn="l">
               <a:buSzPct val="100000"/>
               <a:buChar char="•"/>
             </a:pPr>
@@ -8384,7 +8474,7 @@
             <a:endParaRPr sz="2200"/>
           </a:p>
           <a:p xmlns:a="http://schemas.openxmlformats.org/drawingml/2006/main">
-            <a:pPr marL="254000" indent="-254000">
+            <a:pPr marL="254000" indent="-254000" algn="l">
               <a:buSzPct val="100000"/>
               <a:buChar char="•"/>
             </a:pPr>
@@ -8402,7 +8492,7 @@
             <a:endParaRPr sz="2200"/>
           </a:p>
           <a:p xmlns:a="http://schemas.openxmlformats.org/drawingml/2006/main">
-            <a:pPr marL="254000" indent="-254000">
+            <a:pPr marL="254000" indent="-254000" algn="l">
               <a:buSzPct val="100000"/>
               <a:buChar char="•"/>
             </a:pPr>
@@ -8420,7 +8510,7 @@
             <a:endParaRPr sz="2200"/>
           </a:p>
           <a:p xmlns:a="http://schemas.openxmlformats.org/drawingml/2006/main">
-            <a:pPr marL="254000" indent="-254000">
+            <a:pPr marL="254000" indent="-254000" algn="l">
               <a:buSzPct val="100000"/>
               <a:buChar char="•"/>
             </a:pPr>
@@ -8515,7 +8605,7 @@
           <p:cNvPr id="2" name="Image 0">
             <a:extLst xmlns:a="http://schemas.openxmlformats.org/drawingml/2006/main">
               <a:ext uri="{FF2B5EF4-FFF2-40B4-BE49-F238E27FC236}">
-                <a16:creationId xmlns:a16="http://schemas.microsoft.com/office/drawing/2014/main" id="{6CCAC4C8-2A3D-402A-AFFA-DC82642C1AF1}"/>
+                <a16:creationId xmlns:a16="http://schemas.microsoft.com/office/drawing/2014/main" id="{E91945F6-359C-49E9-A4D2-560425A033CD}"/>
               </a:ext>
             </a:extLst>
           </p:cNvPr>
@@ -8525,7 +8615,7 @@
           <p:nvPr/>
         </p:nvPicPr>
         <p:blipFill>
-          <a:blip xmlns:r="http://schemas.openxmlformats.org/officeDocument/2006/relationships" xmlns:a="http://schemas.openxmlformats.org/drawingml/2006/main" r:embed="R3b39530a14ef422c"/>
+          <a:blip xmlns:r="http://schemas.openxmlformats.org/officeDocument/2006/relationships" xmlns:a="http://schemas.openxmlformats.org/drawingml/2006/main" r:embed="R0875cc2f76f34bc4"/>
           <a:srcRect xmlns:a="http://schemas.openxmlformats.org/drawingml/2006/main" l="0" t="0" r="0" b="0"/>
           <a:stretch xmlns:a="http://schemas.openxmlformats.org/drawingml/2006/main">
             <a:fillRect l="0" t="0" r="0" b="0"/>
@@ -8558,7 +8648,7 @@
         <p:spPr>
           <a:xfrm xmlns:a="http://schemas.openxmlformats.org/drawingml/2006/main">
             <a:off x="594360" y="438912"/>
-            <a:ext cx="10972800" cy="502920"/>
+            <a:ext cx="9673590" cy="502920"/>
           </a:xfrm>
           <a:prstGeom xmlns:a="http://schemas.openxmlformats.org/drawingml/2006/main" prst="rect">
             <a:avLst/>
@@ -8566,7 +8656,9 @@
           <a:noFill xmlns:a="http://schemas.openxmlformats.org/drawingml/2006/main"/>
         </p:spPr>
         <p:txBody>
-          <a:bodyPr xmlns:a="http://schemas.openxmlformats.org/drawingml/2006/main" wrap="square" lIns="0" tIns="0" rIns="0" bIns="0" anchor="ctr"/>
+          <a:bodyPr xmlns:a="http://schemas.openxmlformats.org/drawingml/2006/main" wrap="square" lIns="0" tIns="0" rIns="0" bIns="0" anchor="ctr">
+            <a:normAutofit fontScale="100000"/>
+          </a:bodyPr>
           <a:lstStyle xmlns:a="http://schemas.openxmlformats.org/drawingml/2006/main"/>
           <a:p xmlns:a="http://schemas.openxmlformats.org/drawingml/2006/main">
             <a:pPr marL="0" indent="0">
@@ -8604,7 +8696,7 @@
         <p:spPr>
           <a:xfrm xmlns:a="http://schemas.openxmlformats.org/drawingml/2006/main">
             <a:off x="612648" y="987552"/>
-            <a:ext cx="10881360" cy="320040"/>
+            <a:ext cx="9655302" cy="320040"/>
           </a:xfrm>
           <a:prstGeom xmlns:a="http://schemas.openxmlformats.org/drawingml/2006/main" prst="rect">
             <a:avLst/>
@@ -8612,7 +8704,9 @@
           <a:noFill xmlns:a="http://schemas.openxmlformats.org/drawingml/2006/main"/>
         </p:spPr>
         <p:txBody>
-          <a:bodyPr xmlns:a="http://schemas.openxmlformats.org/drawingml/2006/main" wrap="square" lIns="0" tIns="0" rIns="0" bIns="0" anchor="ctr"/>
+          <a:bodyPr xmlns:a="http://schemas.openxmlformats.org/drawingml/2006/main" wrap="square" lIns="0" tIns="0" rIns="0" bIns="0" anchor="ctr">
+            <a:normAutofit fontScale="100000"/>
+          </a:bodyPr>
           <a:lstStyle xmlns:a="http://schemas.openxmlformats.org/drawingml/2006/main"/>
           <a:p xmlns:a="http://schemas.openxmlformats.org/drawingml/2006/main">
             <a:pPr marL="0" indent="0">
@@ -8658,12 +8752,14 @@
           <a:noFill xmlns:a="http://schemas.openxmlformats.org/drawingml/2006/main"/>
         </p:spPr>
         <p:txBody>
-          <a:bodyPr xmlns:a="http://schemas.openxmlformats.org/drawingml/2006/main" wrap="square" lIns="635" tIns="635" rIns="635" bIns="635" anchor="ctr">
-            <a:normAutofit/>
+          <a:bodyPr xmlns:a="http://schemas.openxmlformats.org/drawingml/2006/main" wrap="square" lIns="0" tIns="0" rIns="0" bIns="0" anchor="t">
+            <a:normAutofit fontScale="100000"/>
           </a:bodyPr>
-          <a:lstStyle xmlns:a="http://schemas.openxmlformats.org/drawingml/2006/main"/>
-          <a:p xmlns:a="http://schemas.openxmlformats.org/drawingml/2006/main">
-            <a:pPr marL="254000" indent="-254000">
+          <a:lstStyle xmlns:a="http://schemas.openxmlformats.org/drawingml/2006/main">
+            <a:defPPr algn="l"/>
+          </a:lstStyle>
+          <a:p xmlns:a="http://schemas.openxmlformats.org/drawingml/2006/main">
+            <a:pPr marL="254000" indent="-254000" algn="l">
               <a:buSzPct val="100000"/>
               <a:buChar char="•"/>
             </a:pPr>
@@ -8681,7 +8777,7 @@
             <a:endParaRPr sz="2200"/>
           </a:p>
           <a:p xmlns:a="http://schemas.openxmlformats.org/drawingml/2006/main">
-            <a:pPr marL="254000" indent="-254000">
+            <a:pPr marL="254000" indent="-254000" algn="l">
               <a:buSzPct val="100000"/>
               <a:buChar char="•"/>
             </a:pPr>
@@ -8699,7 +8795,7 @@
             <a:endParaRPr sz="2200"/>
           </a:p>
           <a:p xmlns:a="http://schemas.openxmlformats.org/drawingml/2006/main">
-            <a:pPr marL="254000" indent="-254000">
+            <a:pPr marL="254000" indent="-254000" algn="l">
               <a:buSzPct val="100000"/>
               <a:buChar char="•"/>
             </a:pPr>
@@ -8794,7 +8890,7 @@
           <p:cNvPr id="2" name="Image 0">
             <a:extLst xmlns:a="http://schemas.openxmlformats.org/drawingml/2006/main">
               <a:ext uri="{FF2B5EF4-FFF2-40B4-BE49-F238E27FC236}">
-                <a16:creationId xmlns:a16="http://schemas.microsoft.com/office/drawing/2014/main" id="{7C649F3B-00C6-40E7-9485-A6235FE4316B}"/>
+                <a16:creationId xmlns:a16="http://schemas.microsoft.com/office/drawing/2014/main" id="{80EFDF3B-6A54-4748-8345-5A586E5D1EB5}"/>
               </a:ext>
             </a:extLst>
           </p:cNvPr>
@@ -8804,7 +8900,7 @@
           <p:nvPr/>
         </p:nvPicPr>
         <p:blipFill>
-          <a:blip xmlns:r="http://schemas.openxmlformats.org/officeDocument/2006/relationships" xmlns:a="http://schemas.openxmlformats.org/drawingml/2006/main" r:embed="R482ab5a278e14e9e"/>
+          <a:blip xmlns:r="http://schemas.openxmlformats.org/officeDocument/2006/relationships" xmlns:a="http://schemas.openxmlformats.org/drawingml/2006/main" r:embed="Rcacfcdb140b245cf"/>
           <a:srcRect xmlns:a="http://schemas.openxmlformats.org/drawingml/2006/main" l="0" t="0" r="0" b="0"/>
           <a:stretch xmlns:a="http://schemas.openxmlformats.org/drawingml/2006/main">
             <a:fillRect l="0" t="0" r="0" b="0"/>
@@ -8837,7 +8933,7 @@
         <p:spPr>
           <a:xfrm xmlns:a="http://schemas.openxmlformats.org/drawingml/2006/main">
             <a:off x="594360" y="438912"/>
-            <a:ext cx="10972800" cy="502920"/>
+            <a:ext cx="9673590" cy="502920"/>
           </a:xfrm>
           <a:prstGeom xmlns:a="http://schemas.openxmlformats.org/drawingml/2006/main" prst="rect">
             <a:avLst/>
@@ -8845,7 +8941,9 @@
           <a:noFill xmlns:a="http://schemas.openxmlformats.org/drawingml/2006/main"/>
         </p:spPr>
         <p:txBody>
-          <a:bodyPr xmlns:a="http://schemas.openxmlformats.org/drawingml/2006/main" wrap="square" lIns="0" tIns="0" rIns="0" bIns="0" anchor="ctr"/>
+          <a:bodyPr xmlns:a="http://schemas.openxmlformats.org/drawingml/2006/main" wrap="square" lIns="0" tIns="0" rIns="0" bIns="0" anchor="ctr">
+            <a:normAutofit fontScale="100000"/>
+          </a:bodyPr>
           <a:lstStyle xmlns:a="http://schemas.openxmlformats.org/drawingml/2006/main"/>
           <a:p xmlns:a="http://schemas.openxmlformats.org/drawingml/2006/main">
             <a:pPr marL="0" indent="0">
@@ -8883,7 +8981,7 @@
         <p:spPr>
           <a:xfrm xmlns:a="http://schemas.openxmlformats.org/drawingml/2006/main">
             <a:off x="612648" y="987552"/>
-            <a:ext cx="10881360" cy="320040"/>
+            <a:ext cx="9655302" cy="320040"/>
           </a:xfrm>
           <a:prstGeom xmlns:a="http://schemas.openxmlformats.org/drawingml/2006/main" prst="rect">
             <a:avLst/>
@@ -8891,7 +8989,9 @@
           <a:noFill xmlns:a="http://schemas.openxmlformats.org/drawingml/2006/main"/>
         </p:spPr>
         <p:txBody>
-          <a:bodyPr xmlns:a="http://schemas.openxmlformats.org/drawingml/2006/main" wrap="square" lIns="0" tIns="0" rIns="0" bIns="0" anchor="ctr"/>
+          <a:bodyPr xmlns:a="http://schemas.openxmlformats.org/drawingml/2006/main" wrap="square" lIns="0" tIns="0" rIns="0" bIns="0" anchor="ctr">
+            <a:normAutofit fontScale="100000"/>
+          </a:bodyPr>
           <a:lstStyle xmlns:a="http://schemas.openxmlformats.org/drawingml/2006/main"/>
           <a:p xmlns:a="http://schemas.openxmlformats.org/drawingml/2006/main">
             <a:pPr marL="0" indent="0">
@@ -8937,12 +9037,14 @@
           <a:noFill xmlns:a="http://schemas.openxmlformats.org/drawingml/2006/main"/>
         </p:spPr>
         <p:txBody>
-          <a:bodyPr xmlns:a="http://schemas.openxmlformats.org/drawingml/2006/main" wrap="square" lIns="635" tIns="635" rIns="635" bIns="635" anchor="ctr">
-            <a:normAutofit/>
+          <a:bodyPr xmlns:a="http://schemas.openxmlformats.org/drawingml/2006/main" wrap="square" lIns="0" tIns="0" rIns="0" bIns="0" anchor="t">
+            <a:normAutofit fontScale="100000"/>
           </a:bodyPr>
-          <a:lstStyle xmlns:a="http://schemas.openxmlformats.org/drawingml/2006/main"/>
-          <a:p xmlns:a="http://schemas.openxmlformats.org/drawingml/2006/main">
-            <a:pPr marL="254000" indent="-254000">
+          <a:lstStyle xmlns:a="http://schemas.openxmlformats.org/drawingml/2006/main">
+            <a:defPPr algn="l"/>
+          </a:lstStyle>
+          <a:p xmlns:a="http://schemas.openxmlformats.org/drawingml/2006/main">
+            <a:pPr marL="254000" indent="-254000" algn="l">
               <a:buSzPct val="100000"/>
               <a:buChar char="•"/>
             </a:pPr>
@@ -8960,7 +9062,7 @@
             <a:endParaRPr sz="2200"/>
           </a:p>
           <a:p xmlns:a="http://schemas.openxmlformats.org/drawingml/2006/main">
-            <a:pPr marL="254000" indent="-254000">
+            <a:pPr marL="254000" indent="-254000" algn="l">
               <a:buSzPct val="100000"/>
               <a:buChar char="•"/>
             </a:pPr>
@@ -8978,7 +9080,7 @@
             <a:endParaRPr sz="2200"/>
           </a:p>
           <a:p xmlns:a="http://schemas.openxmlformats.org/drawingml/2006/main">
-            <a:pPr marL="254000" indent="-254000">
+            <a:pPr marL="254000" indent="-254000" algn="l">
               <a:buSzPct val="100000"/>
               <a:buChar char="•"/>
             </a:pPr>
@@ -8996,7 +9098,7 @@
             <a:endParaRPr sz="2200"/>
           </a:p>
           <a:p xmlns:a="http://schemas.openxmlformats.org/drawingml/2006/main">
-            <a:pPr marL="254000" indent="-254000">
+            <a:pPr marL="254000" indent="-254000" algn="l">
               <a:buSzPct val="100000"/>
               <a:buChar char="•"/>
             </a:pPr>
